--- a/presentations/MACE-in-practice-LJC-Summer-School-Introduction.pptx
+++ b/presentations/MACE-in-practice-LJC-Summer-School-Introduction.pptx
@@ -15,6 +15,7 @@
     <p:sldId id="260" r:id="rId10"/>
     <p:sldId id="261" r:id="rId11"/>
     <p:sldId id="262" r:id="rId12"/>
+    <p:sldId id="263" r:id="rId13"/>
   </p:sldIdLst>
   <p:sldSz cy="6858000" cx="12191675"/>
   <p:notesSz cx="6858000" cy="9144000"/>
@@ -796,7 +797,7 @@
   <p:cSld>
     <p:spTree>
       <p:nvGrpSpPr>
-        <p:cNvPr id="94" name="Shape 94"/>
+        <p:cNvPr id="97" name="Shape 97"/>
         <p:cNvGrpSpPr/>
         <p:nvPr/>
       </p:nvGrpSpPr>
@@ -810,7 +811,7 @@
       </p:grpSpPr>
       <p:sp>
         <p:nvSpPr>
-          <p:cNvPr id="95" name="Google Shape;95;p3:notes"/>
+          <p:cNvPr id="98" name="Google Shape;98;p3:notes"/>
           <p:cNvSpPr txBox="1"/>
           <p:nvPr>
             <p:ph idx="1" type="body"/>
@@ -849,7 +850,7 @@
       </p:sp>
       <p:sp>
         <p:nvSpPr>
-          <p:cNvPr id="96" name="Google Shape;96;p3:notes"/>
+          <p:cNvPr id="99" name="Google Shape;99;p3:notes"/>
           <p:cNvSpPr/>
           <p:nvPr>
             <p:ph idx="2" type="sldImg"/>
@@ -895,7 +896,7 @@
   <p:cSld>
     <p:spTree>
       <p:nvGrpSpPr>
-        <p:cNvPr id="120" name="Shape 120"/>
+        <p:cNvPr id="119" name="Shape 119"/>
         <p:cNvGrpSpPr/>
         <p:nvPr/>
       </p:nvGrpSpPr>
@@ -909,7 +910,7 @@
       </p:grpSpPr>
       <p:sp>
         <p:nvSpPr>
-          <p:cNvPr id="121" name="Google Shape;121;p2:notes"/>
+          <p:cNvPr id="120" name="Google Shape;120;p2:notes"/>
           <p:cNvSpPr txBox="1"/>
           <p:nvPr>
             <p:ph idx="1" type="body"/>
@@ -948,7 +949,7 @@
       </p:sp>
       <p:sp>
         <p:nvSpPr>
-          <p:cNvPr id="122" name="Google Shape;122;p2:notes"/>
+          <p:cNvPr id="121" name="Google Shape;121;p2:notes"/>
           <p:cNvSpPr/>
           <p:nvPr>
             <p:ph idx="2" type="sldImg"/>
@@ -994,7 +995,7 @@
   <p:cSld>
     <p:spTree>
       <p:nvGrpSpPr>
-        <p:cNvPr id="156" name="Shape 156"/>
+        <p:cNvPr id="150" name="Shape 150"/>
         <p:cNvGrpSpPr/>
         <p:nvPr/>
       </p:nvGrpSpPr>
@@ -1008,7 +1009,7 @@
       </p:grpSpPr>
       <p:sp>
         <p:nvSpPr>
-          <p:cNvPr id="157" name="Google Shape;157;p1:notes"/>
+          <p:cNvPr id="151" name="Google Shape;151;p1:notes"/>
           <p:cNvSpPr txBox="1"/>
           <p:nvPr>
             <p:ph idx="1" type="body"/>
@@ -1047,7 +1048,7 @@
       </p:sp>
       <p:sp>
         <p:nvSpPr>
-          <p:cNvPr id="158" name="Google Shape;158;p1:notes"/>
+          <p:cNvPr id="152" name="Google Shape;152;p1:notes"/>
           <p:cNvSpPr/>
           <p:nvPr>
             <p:ph idx="2" type="sldImg"/>
@@ -1093,7 +1094,7 @@
   <p:cSld>
     <p:spTree>
       <p:nvGrpSpPr>
-        <p:cNvPr id="194" name="Shape 194"/>
+        <p:cNvPr id="188" name="Shape 188"/>
         <p:cNvGrpSpPr/>
         <p:nvPr/>
       </p:nvGrpSpPr>
@@ -1107,7 +1108,7 @@
       </p:grpSpPr>
       <p:sp>
         <p:nvSpPr>
-          <p:cNvPr id="195" name="Google Shape;195;ext_section_title:notes"/>
+          <p:cNvPr id="189" name="Google Shape;189;ext_section_title:notes"/>
           <p:cNvSpPr/>
           <p:nvPr>
             <p:ph idx="2" type="sldImg"/>
@@ -1142,7 +1143,7 @@
       </p:sp>
       <p:sp>
         <p:nvSpPr>
-          <p:cNvPr id="196" name="Google Shape;196;ext_section_title:notes"/>
+          <p:cNvPr id="190" name="Google Shape;190;ext_section_title:notes"/>
           <p:cNvSpPr txBox="1"/>
           <p:nvPr>
             <p:ph idx="1" type="body"/>
@@ -1192,7 +1193,7 @@
   <p:cSld>
     <p:spTree>
       <p:nvGrpSpPr>
-        <p:cNvPr id="208" name="Shape 208"/>
+        <p:cNvPr id="202" name="Shape 202"/>
         <p:cNvGrpSpPr/>
         <p:nvPr/>
       </p:nvGrpSpPr>
@@ -1206,7 +1207,7 @@
       </p:grpSpPr>
       <p:sp>
         <p:nvSpPr>
-          <p:cNvPr id="209" name="Google Shape;209;ext_macefield_recipe:notes"/>
+          <p:cNvPr id="203" name="Google Shape;203;ext_macefield_recipe:notes"/>
           <p:cNvSpPr txBox="1"/>
           <p:nvPr>
             <p:ph idx="1" type="body"/>
@@ -1245,7 +1246,7 @@
       </p:sp>
       <p:sp>
         <p:nvSpPr>
-          <p:cNvPr id="210" name="Google Shape;210;ext_macefield_recipe:notes"/>
+          <p:cNvPr id="204" name="Google Shape;204;ext_macefield_recipe:notes"/>
           <p:cNvSpPr/>
           <p:nvPr>
             <p:ph idx="2" type="sldImg"/>
@@ -1291,7 +1292,7 @@
   <p:cSld>
     <p:spTree>
       <p:nvGrpSpPr>
-        <p:cNvPr id="246" name="Shape 246"/>
+        <p:cNvPr id="240" name="Shape 240"/>
         <p:cNvGrpSpPr/>
         <p:nvPr/>
       </p:nvGrpSpPr>
@@ -1305,7 +1306,7 @@
       </p:grpSpPr>
       <p:sp>
         <p:nvSpPr>
-          <p:cNvPr id="247" name="Google Shape;247;ext_macefield_code_map:notes"/>
+          <p:cNvPr id="241" name="Google Shape;241;ext_macefield_code_map:notes"/>
           <p:cNvSpPr txBox="1"/>
           <p:nvPr>
             <p:ph idx="1" type="body"/>
@@ -1344,7 +1345,106 @@
       </p:sp>
       <p:sp>
         <p:nvSpPr>
-          <p:cNvPr id="248" name="Google Shape;248;ext_macefield_code_map:notes"/>
+          <p:cNvPr id="242" name="Google Shape;242;ext_macefield_code_map:notes"/>
+          <p:cNvSpPr/>
+          <p:nvPr>
+            <p:ph idx="2" type="sldImg"/>
+          </p:nvPr>
+        </p:nvSpPr>
+        <p:spPr>
+          <a:xfrm>
+            <a:off x="1143225" y="685800"/>
+            <a:ext cx="4572300" cy="3429000"/>
+          </a:xfrm>
+          <a:custGeom>
+            <a:rect b="b" l="l" r="r" t="t"/>
+            <a:pathLst>
+              <a:path extrusionOk="0" h="120000" w="120000">
+                <a:moveTo>
+                  <a:pt x="0" y="0"/>
+                </a:moveTo>
+                <a:lnTo>
+                  <a:pt x="120000" y="0"/>
+                </a:lnTo>
+                <a:lnTo>
+                  <a:pt x="120000" y="120000"/>
+                </a:lnTo>
+                <a:lnTo>
+                  <a:pt x="0" y="120000"/>
+                </a:lnTo>
+                <a:close/>
+              </a:path>
+            </a:pathLst>
+          </a:custGeom>
+        </p:spPr>
+      </p:sp>
+    </p:spTree>
+  </p:cSld>
+  <p:clrMapOvr>
+    <a:masterClrMapping/>
+  </p:clrMapOvr>
+</p:notes>
+</file>
+
+<file path=ppt/notesSlides/notesSlide8.xml><?xml version="1.0" encoding="utf-8"?>
+<p:notes xmlns:a="http://schemas.openxmlformats.org/drawingml/2006/main" xmlns:r="http://schemas.openxmlformats.org/officeDocument/2006/relationships" xmlns:mc="http://schemas.openxmlformats.org/markup-compatibility/2006" xmlns:mv="urn:schemas-microsoft-com:mac:vml" xmlns:p="http://schemas.openxmlformats.org/presentationml/2006/main" xmlns:c="http://schemas.openxmlformats.org/drawingml/2006/chart" xmlns:dgm="http://schemas.openxmlformats.org/drawingml/2006/diagram" xmlns:o="urn:schemas-microsoft-com:office:office" xmlns:v="urn:schemas-microsoft-com:vml" xmlns:pvml="urn:schemas-microsoft-com:office:powerpoint" xmlns:com="http://schemas.openxmlformats.org/drawingml/2006/compatibility" xmlns:p14="http://schemas.microsoft.com/office/powerpoint/2010/main" xmlns:p15="http://schemas.microsoft.com/office/powerpoint/2012/main" xmlns:ahyp="http://schemas.microsoft.com/office/drawing/2018/hyperlinkcolor" showMasterPhAnim="0" showMasterSp="0">
+  <p:cSld>
+    <p:spTree>
+      <p:nvGrpSpPr>
+        <p:cNvPr id="276" name="Shape 276"/>
+        <p:cNvGrpSpPr/>
+        <p:nvPr/>
+      </p:nvGrpSpPr>
+      <p:grpSpPr>
+        <a:xfrm>
+          <a:off x="0" y="0"/>
+          <a:ext cx="0" cy="0"/>
+          <a:chOff x="0" y="0"/>
+          <a:chExt cx="0" cy="0"/>
+        </a:xfrm>
+      </p:grpSpPr>
+      <p:sp>
+        <p:nvSpPr>
+          <p:cNvPr id="277" name="Google Shape;277;ext_macefield_source_tree:notes"/>
+          <p:cNvSpPr txBox="1"/>
+          <p:nvPr>
+            <p:ph idx="1" type="body"/>
+          </p:nvPr>
+        </p:nvSpPr>
+        <p:spPr>
+          <a:xfrm>
+            <a:off x="685800" y="4343400"/>
+            <a:ext cx="5486400" cy="4114800"/>
+          </a:xfrm>
+          <a:prstGeom prst="rect">
+            <a:avLst/>
+          </a:prstGeom>
+        </p:spPr>
+        <p:txBody>
+          <a:bodyPr anchorCtr="0" anchor="t" bIns="91425" lIns="91425" spcFirstLastPara="1" rIns="91425" wrap="square" tIns="91425">
+            <a:noAutofit/>
+          </a:bodyPr>
+          <a:lstStyle/>
+          <a:p>
+            <a:pPr indent="0" lvl="0" marL="0" rtl="0" algn="l">
+              <a:spcBef>
+                <a:spcPts val="0"/>
+              </a:spcBef>
+              <a:spcAft>
+                <a:spcPts val="0"/>
+              </a:spcAft>
+              <a:buNone/>
+            </a:pPr>
+            <a:r>
+              <a:t/>
+            </a:r>
+            <a:endParaRPr/>
+          </a:p>
+        </p:txBody>
+      </p:sp>
+      <p:sp>
+        <p:nvSpPr>
+          <p:cNvPr id="278" name="Google Shape;278;ext_macefield_source_tree:notes"/>
           <p:cNvSpPr/>
           <p:nvPr>
             <p:ph idx="2" type="sldImg"/>
@@ -11533,6 +11633,163 @@
           </a:p>
         </p:txBody>
       </p:sp>
+      <p:sp>
+        <p:nvSpPr>
+          <p:cNvPr id="94" name="Google Shape;94;p13"/>
+          <p:cNvSpPr/>
+          <p:nvPr/>
+        </p:nvSpPr>
+        <p:spPr>
+          <a:xfrm>
+            <a:off x="960120" y="3511550"/>
+            <a:ext cx="6222900" cy="489000"/>
+          </a:xfrm>
+          <a:prstGeom prst="roundRect">
+            <a:avLst>
+              <a:gd fmla="val 16667" name="adj"/>
+            </a:avLst>
+          </a:prstGeom>
+          <a:solidFill>
+            <a:srgbClr val="EDF5F4"/>
+          </a:solidFill>
+          <a:ln>
+            <a:noFill/>
+          </a:ln>
+        </p:spPr>
+        <p:txBody>
+          <a:bodyPr anchorCtr="0" anchor="ctr" bIns="91425" lIns="91425" spcFirstLastPara="1" rIns="91425" wrap="square" tIns="91425">
+            <a:noAutofit/>
+          </a:bodyPr>
+          <a:lstStyle/>
+          <a:p>
+            <a:pPr indent="0" lvl="0" marL="0" rtl="0" algn="ctr">
+              <a:spcBef>
+                <a:spcPts val="0"/>
+              </a:spcBef>
+              <a:spcAft>
+                <a:spcPts val="0"/>
+              </a:spcAft>
+              <a:buNone/>
+            </a:pPr>
+            <a:r>
+              <a:t/>
+            </a:r>
+            <a:endParaRPr>
+              <a:latin typeface="Calibri"/>
+              <a:ea typeface="Calibri"/>
+              <a:cs typeface="Calibri"/>
+              <a:sym typeface="Calibri"/>
+            </a:endParaRPr>
+          </a:p>
+        </p:txBody>
+      </p:sp>
+      <p:sp>
+        <p:nvSpPr>
+          <p:cNvPr id="95" name="Google Shape;95;p13"/>
+          <p:cNvSpPr txBox="1"/>
+          <p:nvPr/>
+        </p:nvSpPr>
+        <p:spPr>
+          <a:xfrm>
+            <a:off x="1193800" y="3637280"/>
+            <a:ext cx="1041300" cy="241200"/>
+          </a:xfrm>
+          <a:prstGeom prst="rect">
+            <a:avLst/>
+          </a:prstGeom>
+          <a:noFill/>
+          <a:ln>
+            <a:noFill/>
+          </a:ln>
+        </p:spPr>
+        <p:txBody>
+          <a:bodyPr anchorCtr="0" anchor="t" bIns="91425" lIns="91425" spcFirstLastPara="1" rIns="91425" wrap="square" tIns="91425">
+            <a:noAutofit/>
+          </a:bodyPr>
+          <a:lstStyle/>
+          <a:p>
+            <a:pPr indent="0" lvl="0" marL="0" rtl="0" algn="l">
+              <a:spcBef>
+                <a:spcPts val="0"/>
+              </a:spcBef>
+              <a:spcAft>
+                <a:spcPts val="0"/>
+              </a:spcAft>
+              <a:buNone/>
+            </a:pPr>
+            <a:r>
+              <a:rPr b="1" lang="en-US" sz="950">
+                <a:solidFill>
+                  <a:srgbClr val="25848B"/>
+                </a:solidFill>
+              </a:rPr>
+              <a:t>REPOSITORY</a:t>
+            </a:r>
+            <a:endParaRPr b="1" sz="950">
+              <a:solidFill>
+                <a:srgbClr val="25848B"/>
+              </a:solidFill>
+            </a:endParaRPr>
+          </a:p>
+        </p:txBody>
+      </p:sp>
+      <p:sp>
+        <p:nvSpPr>
+          <p:cNvPr id="96" name="Google Shape;96;p13"/>
+          <p:cNvSpPr txBox="1"/>
+          <p:nvPr/>
+        </p:nvSpPr>
+        <p:spPr>
+          <a:xfrm>
+            <a:off x="2286000" y="3601720"/>
+            <a:ext cx="4698900" cy="292200"/>
+          </a:xfrm>
+          <a:prstGeom prst="rect">
+            <a:avLst/>
+          </a:prstGeom>
+          <a:noFill/>
+          <a:ln>
+            <a:noFill/>
+          </a:ln>
+        </p:spPr>
+        <p:txBody>
+          <a:bodyPr anchorCtr="0" anchor="t" bIns="91425" lIns="91425" spcFirstLastPara="1" rIns="91425" wrap="square" tIns="91425">
+            <a:noAutofit/>
+          </a:bodyPr>
+          <a:lstStyle/>
+          <a:p>
+            <a:pPr indent="0" lvl="0" marL="0" rtl="0" algn="l">
+              <a:spcBef>
+                <a:spcPts val="0"/>
+              </a:spcBef>
+              <a:spcAft>
+                <a:spcPts val="0"/>
+              </a:spcAft>
+              <a:buNone/>
+            </a:pPr>
+            <a:r>
+              <a:rPr b="1" lang="en-US" sz="1300" u="sng">
+                <a:solidFill>
+                  <a:srgbClr val="256675"/>
+                </a:solidFill>
+                <a:hlinkClick r:id="rId3">
+                  <a:extLst>
+                    <a:ext uri="{A12FA001-AC4F-418D-AE19-62706E023703}">
+                      <ahyp:hlinkClr val="tx"/>
+                    </a:ext>
+                  </a:extLst>
+                </a:hlinkClick>
+              </a:rPr>
+              <a:t>github.com/Neutrino155/MACE_tutorials</a:t>
+            </a:r>
+            <a:endParaRPr b="1" sz="1300" u="sng">
+              <a:solidFill>
+                <a:srgbClr val="256675"/>
+              </a:solidFill>
+            </a:endParaRPr>
+          </a:p>
+        </p:txBody>
+      </p:sp>
     </p:spTree>
   </p:cSld>
   <p:clrMapOvr>
@@ -11553,7 +11810,7 @@
     </p:bg>
     <p:spTree>
       <p:nvGrpSpPr>
-        <p:cNvPr id="97" name="Shape 97"/>
+        <p:cNvPr id="100" name="Shape 100"/>
         <p:cNvGrpSpPr/>
         <p:nvPr/>
       </p:nvGrpSpPr>
@@ -11567,7 +11824,7 @@
       </p:grpSpPr>
       <p:sp>
         <p:nvSpPr>
-          <p:cNvPr id="98" name="Google Shape;98;p14"/>
+          <p:cNvPr id="101" name="Google Shape;101;p14"/>
           <p:cNvSpPr/>
           <p:nvPr/>
         </p:nvSpPr>
@@ -11625,7 +11882,7 @@
       </p:sp>
       <p:sp>
         <p:nvSpPr>
-          <p:cNvPr id="99" name="Google Shape;99;p14"/>
+          <p:cNvPr id="102" name="Google Shape;102;p14"/>
           <p:cNvSpPr txBox="1"/>
           <p:nvPr/>
         </p:nvSpPr>
@@ -11675,7 +11932,7 @@
       </p:sp>
       <p:sp>
         <p:nvSpPr>
-          <p:cNvPr id="100" name="Google Shape;100;p14"/>
+          <p:cNvPr id="103" name="Google Shape;103;p14"/>
           <p:cNvSpPr txBox="1"/>
           <p:nvPr/>
         </p:nvSpPr>
@@ -11713,7 +11970,15 @@
                   <a:srgbClr val="183148"/>
                 </a:solidFill>
               </a:rPr>
-              <a:t>Workshop flow</a:t>
+              <a:t>Tutorials</a:t>
+            </a:r>
+            <a:r>
+              <a:rPr b="1" lang="en-US" sz="3000">
+                <a:solidFill>
+                  <a:srgbClr val="183148"/>
+                </a:solidFill>
+              </a:rPr>
+              <a:t> workflow</a:t>
             </a:r>
             <a:endParaRPr/>
           </a:p>
@@ -11721,7 +11986,7 @@
       </p:sp>
       <p:sp>
         <p:nvSpPr>
-          <p:cNvPr id="101" name="Google Shape;101;p14"/>
+          <p:cNvPr id="104" name="Google Shape;104;p14"/>
           <p:cNvSpPr txBox="1"/>
           <p:nvPr/>
         </p:nvSpPr>
@@ -11771,7 +12036,7 @@
       </p:sp>
       <p:sp>
         <p:nvSpPr>
-          <p:cNvPr id="102" name="Google Shape;102;p14"/>
+          <p:cNvPr id="105" name="Google Shape;105;p14"/>
           <p:cNvSpPr txBox="1"/>
           <p:nvPr/>
         </p:nvSpPr>
@@ -11817,14 +12082,14 @@
       </p:sp>
       <p:sp>
         <p:nvSpPr>
-          <p:cNvPr id="103" name="Google Shape;103;p14"/>
+          <p:cNvPr id="106" name="Google Shape;106;p14"/>
           <p:cNvSpPr/>
           <p:nvPr/>
         </p:nvSpPr>
         <p:spPr>
           <a:xfrm>
-            <a:off x="749808" y="1572768"/>
-            <a:ext cx="6784848" cy="914400"/>
+            <a:off x="749795" y="1572775"/>
+            <a:ext cx="10696500" cy="914400"/>
           </a:xfrm>
           <a:prstGeom prst="roundRect">
             <a:avLst>
@@ -11877,7 +12142,7 @@
       </p:sp>
       <p:sp>
         <p:nvSpPr>
-          <p:cNvPr id="104" name="Google Shape;104;p14"/>
+          <p:cNvPr id="107" name="Google Shape;107;p14"/>
           <p:cNvSpPr txBox="1"/>
           <p:nvPr/>
         </p:nvSpPr>
@@ -11923,14 +12188,14 @@
       </p:sp>
       <p:sp>
         <p:nvSpPr>
-          <p:cNvPr id="105" name="Google Shape;105;p14"/>
+          <p:cNvPr id="108" name="Google Shape;108;p14"/>
           <p:cNvSpPr txBox="1"/>
           <p:nvPr/>
         </p:nvSpPr>
         <p:spPr>
           <a:xfrm>
-            <a:off x="2432304" y="1645920"/>
-            <a:ext cx="4882896" cy="768096"/>
+            <a:off x="3410054" y="1645983"/>
+            <a:ext cx="4882800" cy="768000"/>
           </a:xfrm>
           <a:prstGeom prst="rect">
             <a:avLst/>
@@ -11963,44 +12228,20 @@
               </a:rPr>
               <a:t>MACE Practice I + II</a:t>
             </a:r>
-            <a:endParaRPr>
-              <a:solidFill>
-                <a:srgbClr val="FFFFFF"/>
-              </a:solidFill>
-            </a:endParaRPr>
-          </a:p>
-          <a:p>
-            <a:pPr indent="0" lvl="0" marL="0" marR="0" rtl="0" algn="l">
-              <a:spcBef>
-                <a:spcPts val="0"/>
-              </a:spcBef>
-              <a:spcAft>
-                <a:spcPts val="0"/>
-              </a:spcAft>
-              <a:buNone/>
-            </a:pPr>
-            <a:r>
-              <a:rPr lang="en-US">
-                <a:solidFill>
-                  <a:srgbClr val="FFFFFF"/>
-                </a:solidFill>
-              </a:rPr>
-              <a:t>All three co-lead the practical route.</a:t>
-            </a:r>
             <a:endParaRPr/>
           </a:p>
         </p:txBody>
       </p:sp>
       <p:sp>
         <p:nvSpPr>
-          <p:cNvPr id="106" name="Google Shape;106;p14"/>
+          <p:cNvPr id="109" name="Google Shape;109;p14"/>
           <p:cNvSpPr/>
           <p:nvPr/>
         </p:nvSpPr>
         <p:spPr>
           <a:xfrm>
-            <a:off x="749808" y="3017520"/>
-            <a:ext cx="6784848" cy="914400"/>
+            <a:off x="749795" y="3017525"/>
+            <a:ext cx="10696500" cy="914400"/>
           </a:xfrm>
           <a:prstGeom prst="roundRect">
             <a:avLst>
@@ -12053,7 +12294,7 @@
       </p:sp>
       <p:sp>
         <p:nvSpPr>
-          <p:cNvPr id="107" name="Google Shape;107;p14"/>
+          <p:cNvPr id="110" name="Google Shape;110;p14"/>
           <p:cNvSpPr txBox="1"/>
           <p:nvPr/>
         </p:nvSpPr>
@@ -12099,14 +12340,14 @@
       </p:sp>
       <p:sp>
         <p:nvSpPr>
-          <p:cNvPr id="108" name="Google Shape;108;p14"/>
+          <p:cNvPr id="111" name="Google Shape;111;p14"/>
           <p:cNvSpPr txBox="1"/>
           <p:nvPr/>
         </p:nvSpPr>
         <p:spPr>
           <a:xfrm>
-            <a:off x="2432304" y="3090672"/>
-            <a:ext cx="4882896" cy="768096"/>
+            <a:off x="3410054" y="3090735"/>
+            <a:ext cx="4882800" cy="768000"/>
           </a:xfrm>
           <a:prstGeom prst="rect">
             <a:avLst/>
@@ -12139,44 +12380,20 @@
               </a:rPr>
               <a:t>Advanced notebooks</a:t>
             </a:r>
-            <a:endParaRPr>
-              <a:solidFill>
-                <a:srgbClr val="FFFFFF"/>
-              </a:solidFill>
-            </a:endParaRPr>
-          </a:p>
-          <a:p>
-            <a:pPr indent="0" lvl="0" marL="0" marR="0" rtl="0" algn="l">
-              <a:spcBef>
-                <a:spcPts val="0"/>
-              </a:spcBef>
-              <a:spcAft>
-                <a:spcPts val="0"/>
-              </a:spcAft>
-              <a:buNone/>
-            </a:pPr>
-            <a:r>
-              <a:rPr lang="en-US">
-                <a:solidFill>
-                  <a:srgbClr val="FFFFFF"/>
-                </a:solidFill>
-              </a:rPr>
-              <a:t>For early finishers who want more theory or applications.</a:t>
-            </a:r>
             <a:endParaRPr/>
           </a:p>
         </p:txBody>
       </p:sp>
       <p:sp>
         <p:nvSpPr>
-          <p:cNvPr id="109" name="Google Shape;109;p14"/>
+          <p:cNvPr id="112" name="Google Shape;112;p14"/>
           <p:cNvSpPr/>
           <p:nvPr/>
         </p:nvSpPr>
         <p:spPr>
           <a:xfrm>
-            <a:off x="749808" y="4462272"/>
-            <a:ext cx="6784848" cy="914400"/>
+            <a:off x="749795" y="4462275"/>
+            <a:ext cx="10696500" cy="914400"/>
           </a:xfrm>
           <a:prstGeom prst="roundRect">
             <a:avLst>
@@ -12229,14 +12446,14 @@
       </p:sp>
       <p:sp>
         <p:nvSpPr>
-          <p:cNvPr id="110" name="Google Shape;110;p14"/>
+          <p:cNvPr id="113" name="Google Shape;113;p14"/>
           <p:cNvSpPr txBox="1"/>
           <p:nvPr/>
         </p:nvSpPr>
         <p:spPr>
           <a:xfrm>
-            <a:off x="950976" y="4535424"/>
-            <a:ext cx="1426464" cy="768096"/>
+            <a:off x="950975" y="4535425"/>
+            <a:ext cx="1942200" cy="768000"/>
           </a:xfrm>
           <a:prstGeom prst="rect">
             <a:avLst/>
@@ -12267,7 +12484,7 @@
                   <a:srgbClr val="FFFFFF"/>
                 </a:solidFill>
               </a:rPr>
-              <a:t>FINAL 30–45 MIN</a:t>
+              <a:t>BRIEF DEMO</a:t>
             </a:r>
             <a:endParaRPr/>
           </a:p>
@@ -12275,14 +12492,14 @@
       </p:sp>
       <p:sp>
         <p:nvSpPr>
-          <p:cNvPr id="111" name="Google Shape;111;p14"/>
+          <p:cNvPr id="114" name="Google Shape;114;p14"/>
           <p:cNvSpPr txBox="1"/>
           <p:nvPr/>
         </p:nvSpPr>
         <p:spPr>
           <a:xfrm>
-            <a:off x="2432304" y="4535424"/>
-            <a:ext cx="4882896" cy="768096"/>
+            <a:off x="3410054" y="4535487"/>
+            <a:ext cx="4882800" cy="768000"/>
           </a:xfrm>
           <a:prstGeom prst="rect">
             <a:avLst/>
@@ -12315,425 +12532,13 @@
               </a:rPr>
               <a:t>MACE extension examples</a:t>
             </a:r>
-            <a:endParaRPr>
-              <a:solidFill>
-                <a:srgbClr val="FFFFFF"/>
-              </a:solidFill>
-            </a:endParaRPr>
-          </a:p>
-          <a:p>
-            <a:pPr indent="0" lvl="0" marL="0" marR="0" rtl="0" algn="l">
-              <a:spcBef>
-                <a:spcPts val="0"/>
-              </a:spcBef>
-              <a:spcAft>
-                <a:spcPts val="0"/>
-              </a:spcAft>
-              <a:buNone/>
-            </a:pPr>
-            <a:r>
-              <a:rPr lang="en-US">
-                <a:solidFill>
-                  <a:srgbClr val="FFFFFF"/>
-                </a:solidFill>
-              </a:rPr>
-              <a:t>Bradley leads this segment individually.</a:t>
-            </a:r>
             <a:endParaRPr/>
           </a:p>
         </p:txBody>
       </p:sp>
       <p:sp>
         <p:nvSpPr>
-          <p:cNvPr id="112" name="Google Shape;112;p14"/>
-          <p:cNvSpPr/>
-          <p:nvPr/>
-        </p:nvSpPr>
-        <p:spPr>
-          <a:xfrm>
-            <a:off x="8001000" y="1572768"/>
-            <a:ext cx="3566160" cy="4114800"/>
-          </a:xfrm>
-          <a:prstGeom prst="roundRect">
-            <a:avLst>
-              <a:gd fmla="val 8000" name="adj"/>
-            </a:avLst>
-          </a:prstGeom>
-          <a:solidFill>
-            <a:srgbClr val="183148"/>
-          </a:solidFill>
-          <a:ln>
-            <a:noFill/>
-          </a:ln>
-          <a:effectLst>
-            <a:outerShdw blurRad="40000" rotWithShape="0" dir="5400000" dist="23000">
-              <a:srgbClr val="000000">
-                <a:alpha val="34902"/>
-              </a:srgbClr>
-            </a:outerShdw>
-          </a:effectLst>
-        </p:spPr>
-        <p:txBody>
-          <a:bodyPr anchorCtr="0" anchor="ctr" bIns="45700" lIns="91425" spcFirstLastPara="1" rIns="91425" wrap="square" tIns="45700">
-            <a:noAutofit/>
-          </a:bodyPr>
-          <a:lstStyle/>
-          <a:p>
-            <a:pPr indent="0" lvl="0" marL="0" marR="0" rtl="0" algn="ctr">
-              <a:spcBef>
-                <a:spcPts val="0"/>
-              </a:spcBef>
-              <a:spcAft>
-                <a:spcPts val="0"/>
-              </a:spcAft>
-              <a:buNone/>
-            </a:pPr>
-            <a:r>
-              <a:t/>
-            </a:r>
-            <a:endParaRPr b="0" i="0" sz="1800" u="none" cap="none" strike="noStrike">
-              <a:solidFill>
-                <a:schemeClr val="dk1"/>
-              </a:solidFill>
-              <a:latin typeface="Calibri"/>
-              <a:ea typeface="Calibri"/>
-              <a:cs typeface="Calibri"/>
-              <a:sym typeface="Calibri"/>
-            </a:endParaRPr>
-          </a:p>
-        </p:txBody>
-      </p:sp>
-      <p:sp>
-        <p:nvSpPr>
-          <p:cNvPr id="113" name="Google Shape;113;p14"/>
-          <p:cNvSpPr txBox="1"/>
-          <p:nvPr/>
-        </p:nvSpPr>
-        <p:spPr>
-          <a:xfrm>
-            <a:off x="8302752" y="1901952"/>
-            <a:ext cx="2926080" cy="274320"/>
-          </a:xfrm>
-          <a:prstGeom prst="rect">
-            <a:avLst/>
-          </a:prstGeom>
-          <a:noFill/>
-          <a:ln>
-            <a:noFill/>
-          </a:ln>
-        </p:spPr>
-        <p:txBody>
-          <a:bodyPr anchorCtr="0" anchor="ctr" bIns="18275" lIns="18275" spcFirstLastPara="1" rIns="18275" wrap="square" tIns="18275">
-            <a:spAutoFit/>
-          </a:bodyPr>
-          <a:lstStyle/>
-          <a:p>
-            <a:pPr indent="0" lvl="0" marL="0" marR="0" rtl="0" algn="l">
-              <a:spcBef>
-                <a:spcPts val="0"/>
-              </a:spcBef>
-              <a:spcAft>
-                <a:spcPts val="0"/>
-              </a:spcAft>
-              <a:buNone/>
-            </a:pPr>
-            <a:r>
-              <a:rPr b="1" i="0" lang="en-US" sz="1100" u="none" cap="none" strike="noStrike">
-                <a:solidFill>
-                  <a:srgbClr val="87D9D7"/>
-                </a:solidFill>
-                <a:latin typeface="Arial"/>
-                <a:ea typeface="Arial"/>
-                <a:cs typeface="Arial"/>
-                <a:sym typeface="Arial"/>
-              </a:rPr>
-              <a:t>PEOPLE</a:t>
-            </a:r>
-            <a:endParaRPr/>
-          </a:p>
-        </p:txBody>
-      </p:sp>
-      <p:sp>
-        <p:nvSpPr>
-          <p:cNvPr id="114" name="Google Shape;114;p14"/>
-          <p:cNvSpPr txBox="1"/>
-          <p:nvPr/>
-        </p:nvSpPr>
-        <p:spPr>
-          <a:xfrm>
-            <a:off x="8302752" y="2322576"/>
-            <a:ext cx="2926080" cy="502920"/>
-          </a:xfrm>
-          <a:prstGeom prst="rect">
-            <a:avLst/>
-          </a:prstGeom>
-          <a:noFill/>
-          <a:ln>
-            <a:noFill/>
-          </a:ln>
-        </p:spPr>
-        <p:txBody>
-          <a:bodyPr anchorCtr="0" anchor="ctr" bIns="18275" lIns="18275" spcFirstLastPara="1" rIns="18275" wrap="square" tIns="18275">
-            <a:spAutoFit/>
-          </a:bodyPr>
-          <a:lstStyle/>
-          <a:p>
-            <a:pPr indent="0" lvl="0" marL="0" marR="0" rtl="0" algn="l">
-              <a:spcBef>
-                <a:spcPts val="0"/>
-              </a:spcBef>
-              <a:spcAft>
-                <a:spcPts val="0"/>
-              </a:spcAft>
-              <a:buNone/>
-            </a:pPr>
-            <a:r>
-              <a:rPr b="1" i="0" lang="en-US" sz="2100" u="none" cap="none" strike="noStrike">
-                <a:solidFill>
-                  <a:srgbClr val="FFFFFF"/>
-                </a:solidFill>
-                <a:latin typeface="Arial"/>
-                <a:ea typeface="Arial"/>
-                <a:cs typeface="Arial"/>
-                <a:sym typeface="Arial"/>
-              </a:rPr>
-              <a:t>Bradley Martin</a:t>
-            </a:r>
-            <a:endParaRPr/>
-          </a:p>
-        </p:txBody>
-      </p:sp>
-      <p:sp>
-        <p:nvSpPr>
           <p:cNvPr id="115" name="Google Shape;115;p14"/>
-          <p:cNvSpPr txBox="1"/>
-          <p:nvPr/>
-        </p:nvSpPr>
-        <p:spPr>
-          <a:xfrm>
-            <a:off x="8302752" y="2971800"/>
-            <a:ext cx="2926080" cy="502920"/>
-          </a:xfrm>
-          <a:prstGeom prst="rect">
-            <a:avLst/>
-          </a:prstGeom>
-          <a:noFill/>
-          <a:ln>
-            <a:noFill/>
-          </a:ln>
-        </p:spPr>
-        <p:txBody>
-          <a:bodyPr anchorCtr="0" anchor="ctr" bIns="18275" lIns="18275" spcFirstLastPara="1" rIns="18275" wrap="square" tIns="18275">
-            <a:spAutoFit/>
-          </a:bodyPr>
-          <a:lstStyle/>
-          <a:p>
-            <a:pPr indent="0" lvl="0" marL="0" marR="0" rtl="0" algn="l">
-              <a:spcBef>
-                <a:spcPts val="0"/>
-              </a:spcBef>
-              <a:spcAft>
-                <a:spcPts val="0"/>
-              </a:spcAft>
-              <a:buNone/>
-            </a:pPr>
-            <a:r>
-              <a:rPr b="1" i="0" lang="en-US" sz="2100" u="none" cap="none" strike="noStrike">
-                <a:solidFill>
-                  <a:srgbClr val="FFFFFF"/>
-                </a:solidFill>
-                <a:latin typeface="Arial"/>
-                <a:ea typeface="Arial"/>
-                <a:cs typeface="Arial"/>
-                <a:sym typeface="Arial"/>
-              </a:rPr>
-              <a:t>Isaac Parker</a:t>
-            </a:r>
-            <a:endParaRPr/>
-          </a:p>
-        </p:txBody>
-      </p:sp>
-      <p:sp>
-        <p:nvSpPr>
-          <p:cNvPr id="116" name="Google Shape;116;p14"/>
-          <p:cNvSpPr txBox="1"/>
-          <p:nvPr/>
-        </p:nvSpPr>
-        <p:spPr>
-          <a:xfrm>
-            <a:off x="8302752" y="3621024"/>
-            <a:ext cx="2926080" cy="502920"/>
-          </a:xfrm>
-          <a:prstGeom prst="rect">
-            <a:avLst/>
-          </a:prstGeom>
-          <a:noFill/>
-          <a:ln>
-            <a:noFill/>
-          </a:ln>
-        </p:spPr>
-        <p:txBody>
-          <a:bodyPr anchorCtr="0" anchor="ctr" bIns="18275" lIns="18275" spcFirstLastPara="1" rIns="18275" wrap="square" tIns="18275">
-            <a:spAutoFit/>
-          </a:bodyPr>
-          <a:lstStyle/>
-          <a:p>
-            <a:pPr indent="0" lvl="0" marL="0" marR="0" rtl="0" algn="l">
-              <a:spcBef>
-                <a:spcPts val="0"/>
-              </a:spcBef>
-              <a:spcAft>
-                <a:spcPts val="0"/>
-              </a:spcAft>
-              <a:buNone/>
-            </a:pPr>
-            <a:r>
-              <a:rPr b="1" i="0" lang="en-US" sz="2100" u="none" cap="none" strike="noStrike">
-                <a:solidFill>
-                  <a:srgbClr val="FFFFFF"/>
-                </a:solidFill>
-                <a:latin typeface="Arial"/>
-                <a:ea typeface="Arial"/>
-                <a:cs typeface="Arial"/>
-                <a:sym typeface="Arial"/>
-              </a:rPr>
-              <a:t>Joe Hart</a:t>
-            </a:r>
-            <a:endParaRPr/>
-          </a:p>
-        </p:txBody>
-      </p:sp>
-      <p:sp>
-        <p:nvSpPr>
-          <p:cNvPr id="117" name="Google Shape;117;p14"/>
-          <p:cNvSpPr/>
-          <p:nvPr/>
-        </p:nvSpPr>
-        <p:spPr>
-          <a:xfrm>
-            <a:off x="8302752" y="4370832"/>
-            <a:ext cx="585216" cy="54864"/>
-          </a:xfrm>
-          <a:prstGeom prst="rect">
-            <a:avLst/>
-          </a:prstGeom>
-          <a:solidFill>
-            <a:srgbClr val="D9A441"/>
-          </a:solidFill>
-          <a:ln>
-            <a:noFill/>
-          </a:ln>
-          <a:effectLst>
-            <a:outerShdw blurRad="40000" rotWithShape="0" dir="5400000" dist="23000">
-              <a:srgbClr val="000000">
-                <a:alpha val="34902"/>
-              </a:srgbClr>
-            </a:outerShdw>
-          </a:effectLst>
-        </p:spPr>
-        <p:txBody>
-          <a:bodyPr anchorCtr="0" anchor="ctr" bIns="45700" lIns="91425" spcFirstLastPara="1" rIns="91425" wrap="square" tIns="45700">
-            <a:noAutofit/>
-          </a:bodyPr>
-          <a:lstStyle/>
-          <a:p>
-            <a:pPr indent="0" lvl="0" marL="0" marR="0" rtl="0" algn="ctr">
-              <a:spcBef>
-                <a:spcPts val="0"/>
-              </a:spcBef>
-              <a:spcAft>
-                <a:spcPts val="0"/>
-              </a:spcAft>
-              <a:buNone/>
-            </a:pPr>
-            <a:r>
-              <a:t/>
-            </a:r>
-            <a:endParaRPr b="0" i="0" sz="1800" u="none" cap="none" strike="noStrike">
-              <a:solidFill>
-                <a:schemeClr val="dk1"/>
-              </a:solidFill>
-              <a:latin typeface="Calibri"/>
-              <a:ea typeface="Calibri"/>
-              <a:cs typeface="Calibri"/>
-              <a:sym typeface="Calibri"/>
-            </a:endParaRPr>
-          </a:p>
-        </p:txBody>
-      </p:sp>
-      <p:sp>
-        <p:nvSpPr>
-          <p:cNvPr id="118" name="Google Shape;118;p14"/>
-          <p:cNvSpPr txBox="1"/>
-          <p:nvPr/>
-        </p:nvSpPr>
-        <p:spPr>
-          <a:xfrm>
-            <a:off x="8302752" y="4626864"/>
-            <a:ext cx="2926080" cy="658368"/>
-          </a:xfrm>
-          <a:prstGeom prst="rect">
-            <a:avLst/>
-          </a:prstGeom>
-          <a:noFill/>
-          <a:ln>
-            <a:noFill/>
-          </a:ln>
-        </p:spPr>
-        <p:txBody>
-          <a:bodyPr anchorCtr="0" anchor="ctr" bIns="18275" lIns="18275" spcFirstLastPara="1" rIns="18275" wrap="square" tIns="18275">
-            <a:noAutofit/>
-          </a:bodyPr>
-          <a:lstStyle/>
-          <a:p>
-            <a:pPr indent="0" lvl="0" marL="0" marR="0" rtl="0" algn="l">
-              <a:spcBef>
-                <a:spcPts val="0"/>
-              </a:spcBef>
-              <a:spcAft>
-                <a:spcPts val="0"/>
-              </a:spcAft>
-              <a:buNone/>
-            </a:pPr>
-            <a:r>
-              <a:rPr lang="en-US" sz="1300">
-                <a:solidFill>
-                  <a:srgbClr val="E0E9EF"/>
-                </a:solidFill>
-              </a:rPr>
-              <a:t>All three · Practice I + II</a:t>
-            </a:r>
-            <a:endParaRPr sz="1300">
-              <a:solidFill>
-                <a:srgbClr val="E0E9EF"/>
-              </a:solidFill>
-            </a:endParaRPr>
-          </a:p>
-          <a:p>
-            <a:pPr indent="0" lvl="0" marL="0" marR="0" rtl="0" algn="l">
-              <a:spcBef>
-                <a:spcPts val="0"/>
-              </a:spcBef>
-              <a:spcAft>
-                <a:spcPts val="0"/>
-              </a:spcAft>
-              <a:buNone/>
-            </a:pPr>
-            <a:r>
-              <a:rPr lang="en-US" sz="1300">
-                <a:solidFill>
-                  <a:srgbClr val="E0E9EF"/>
-                </a:solidFill>
-              </a:rPr>
-              <a:t>Bradley solo · MACE extensions</a:t>
-            </a:r>
-            <a:endParaRPr/>
-          </a:p>
-        </p:txBody>
-      </p:sp>
-      <p:sp>
-        <p:nvSpPr>
-          <p:cNvPr id="119" name="Google Shape;119;p14"/>
           <p:cNvSpPr txBox="1"/>
           <p:nvPr/>
         </p:nvSpPr>
@@ -12772,6 +12577,148 @@
                 </a:solidFill>
               </a:rPr>
               <a:t>10-minute break each hour · Core route: Practice I → Practice II.</a:t>
+            </a:r>
+            <a:endParaRPr/>
+          </a:p>
+        </p:txBody>
+      </p:sp>
+      <p:sp>
+        <p:nvSpPr>
+          <p:cNvPr id="116" name="Google Shape;116;p14"/>
+          <p:cNvSpPr txBox="1"/>
+          <p:nvPr/>
+        </p:nvSpPr>
+        <p:spPr>
+          <a:xfrm>
+            <a:off x="6410054" y="1646020"/>
+            <a:ext cx="4882800" cy="768000"/>
+          </a:xfrm>
+          <a:prstGeom prst="rect">
+            <a:avLst/>
+          </a:prstGeom>
+          <a:noFill/>
+          <a:ln>
+            <a:noFill/>
+          </a:ln>
+        </p:spPr>
+        <p:txBody>
+          <a:bodyPr anchorCtr="0" anchor="ctr" bIns="18275" lIns="18275" spcFirstLastPara="1" rIns="18275" wrap="square" tIns="18275">
+            <a:noAutofit/>
+          </a:bodyPr>
+          <a:lstStyle/>
+          <a:p>
+            <a:pPr indent="0" lvl="0" marL="0" marR="0" rtl="0" algn="r">
+              <a:spcBef>
+                <a:spcPts val="0"/>
+              </a:spcBef>
+              <a:spcAft>
+                <a:spcPts val="0"/>
+              </a:spcAft>
+              <a:buNone/>
+            </a:pPr>
+            <a:r>
+              <a:rPr lang="en-US">
+                <a:solidFill>
+                  <a:srgbClr val="FFFFFF"/>
+                </a:solidFill>
+              </a:rPr>
+              <a:t>For hours 1 and 2</a:t>
+            </a:r>
+            <a:endParaRPr/>
+          </a:p>
+        </p:txBody>
+      </p:sp>
+      <p:sp>
+        <p:nvSpPr>
+          <p:cNvPr id="117" name="Google Shape;117;p14"/>
+          <p:cNvSpPr txBox="1"/>
+          <p:nvPr/>
+        </p:nvSpPr>
+        <p:spPr>
+          <a:xfrm>
+            <a:off x="8292850" y="3166925"/>
+            <a:ext cx="3000000" cy="615600"/>
+          </a:xfrm>
+          <a:prstGeom prst="rect">
+            <a:avLst/>
+          </a:prstGeom>
+          <a:noFill/>
+          <a:ln>
+            <a:noFill/>
+          </a:ln>
+        </p:spPr>
+        <p:txBody>
+          <a:bodyPr anchorCtr="0" anchor="t" bIns="91425" lIns="91425" spcFirstLastPara="1" rIns="91425" wrap="square" tIns="91425">
+            <a:spAutoFit/>
+          </a:bodyPr>
+          <a:lstStyle/>
+          <a:p>
+            <a:pPr indent="0" lvl="0" marL="0" rtl="0" algn="r">
+              <a:spcBef>
+                <a:spcPts val="0"/>
+              </a:spcBef>
+              <a:spcAft>
+                <a:spcPts val="0"/>
+              </a:spcAft>
+              <a:buNone/>
+            </a:pPr>
+            <a:r>
+              <a:rPr lang="en-US">
+                <a:solidFill>
+                  <a:schemeClr val="lt1"/>
+                </a:solidFill>
+              </a:rPr>
+              <a:t>For early finishers who want more theory or applications.</a:t>
+            </a:r>
+            <a:endParaRPr>
+              <a:solidFill>
+                <a:schemeClr val="dk1"/>
+              </a:solidFill>
+            </a:endParaRPr>
+          </a:p>
+        </p:txBody>
+      </p:sp>
+      <p:sp>
+        <p:nvSpPr>
+          <p:cNvPr id="118" name="Google Shape;118;p14"/>
+          <p:cNvSpPr txBox="1"/>
+          <p:nvPr/>
+        </p:nvSpPr>
+        <p:spPr>
+          <a:xfrm>
+            <a:off x="6410054" y="4540020"/>
+            <a:ext cx="4882800" cy="768000"/>
+          </a:xfrm>
+          <a:prstGeom prst="rect">
+            <a:avLst/>
+          </a:prstGeom>
+          <a:noFill/>
+          <a:ln>
+            <a:noFill/>
+          </a:ln>
+        </p:spPr>
+        <p:txBody>
+          <a:bodyPr anchorCtr="0" anchor="ctr" bIns="18275" lIns="18275" spcFirstLastPara="1" rIns="18275" wrap="square" tIns="18275">
+            <a:noAutofit/>
+          </a:bodyPr>
+          <a:lstStyle/>
+          <a:p>
+            <a:pPr indent="0" lvl="0" marL="0" marR="0" rtl="0" algn="r">
+              <a:spcBef>
+                <a:spcPts val="0"/>
+              </a:spcBef>
+              <a:spcAft>
+                <a:spcPts val="0"/>
+              </a:spcAft>
+              <a:buNone/>
+            </a:pPr>
+            <a:r>
+              <a:rPr lang="en-US">
+                <a:solidFill>
+                  <a:srgbClr val="FFFFFF"/>
+                </a:solidFill>
+              </a:rPr>
+              <a:t>~ Last 30-40 mins</a:t>
             </a:r>
             <a:endParaRPr/>
           </a:p>
@@ -12797,7 +12744,7 @@
     </p:bg>
     <p:spTree>
       <p:nvGrpSpPr>
-        <p:cNvPr id="123" name="Shape 123"/>
+        <p:cNvPr id="122" name="Shape 122"/>
         <p:cNvGrpSpPr/>
         <p:nvPr/>
       </p:nvGrpSpPr>
@@ -12811,7 +12758,7 @@
       </p:grpSpPr>
       <p:sp>
         <p:nvSpPr>
-          <p:cNvPr id="124" name="Google Shape;124;p15"/>
+          <p:cNvPr id="123" name="Google Shape;123;p15"/>
           <p:cNvSpPr/>
           <p:nvPr/>
         </p:nvSpPr>
@@ -12869,7 +12816,7 @@
       </p:sp>
       <p:sp>
         <p:nvSpPr>
-          <p:cNvPr id="125" name="Google Shape;125;p15"/>
+          <p:cNvPr id="124" name="Google Shape;124;p15"/>
           <p:cNvSpPr txBox="1"/>
           <p:nvPr/>
         </p:nvSpPr>
@@ -12915,7 +12862,7 @@
       </p:sp>
       <p:sp>
         <p:nvSpPr>
-          <p:cNvPr id="126" name="Google Shape;126;p15"/>
+          <p:cNvPr id="125" name="Google Shape;125;p15"/>
           <p:cNvSpPr txBox="1"/>
           <p:nvPr/>
         </p:nvSpPr>
@@ -12961,7 +12908,7 @@
       </p:sp>
       <p:sp>
         <p:nvSpPr>
-          <p:cNvPr id="127" name="Google Shape;127;p15"/>
+          <p:cNvPr id="126" name="Google Shape;126;p15"/>
           <p:cNvSpPr txBox="1"/>
           <p:nvPr/>
         </p:nvSpPr>
@@ -13011,7 +12958,7 @@
       </p:sp>
       <p:sp>
         <p:nvSpPr>
-          <p:cNvPr id="128" name="Google Shape;128;p15"/>
+          <p:cNvPr id="127" name="Google Shape;127;p15"/>
           <p:cNvSpPr txBox="1"/>
           <p:nvPr/>
         </p:nvSpPr>
@@ -13057,7 +13004,7 @@
       </p:sp>
       <p:sp>
         <p:nvSpPr>
-          <p:cNvPr id="129" name="Google Shape;129;p15"/>
+          <p:cNvPr id="128" name="Google Shape;128;p15"/>
           <p:cNvSpPr/>
           <p:nvPr/>
         </p:nvSpPr>
@@ -13117,7 +13064,7 @@
       </p:sp>
       <p:sp>
         <p:nvSpPr>
-          <p:cNvPr id="130" name="Google Shape;130;p15"/>
+          <p:cNvPr id="129" name="Google Shape;129;p15"/>
           <p:cNvSpPr/>
           <p:nvPr/>
         </p:nvSpPr>
@@ -13177,7 +13124,7 @@
       </p:sp>
       <p:sp>
         <p:nvSpPr>
-          <p:cNvPr id="131" name="Google Shape;131;p15"/>
+          <p:cNvPr id="130" name="Google Shape;130;p15"/>
           <p:cNvSpPr txBox="1"/>
           <p:nvPr/>
         </p:nvSpPr>
@@ -13223,7 +13170,7 @@
       </p:sp>
       <p:sp>
         <p:nvSpPr>
-          <p:cNvPr id="132" name="Google Shape;132;p15"/>
+          <p:cNvPr id="131" name="Google Shape;131;p15"/>
           <p:cNvSpPr txBox="1"/>
           <p:nvPr/>
         </p:nvSpPr>
@@ -13269,7 +13216,7 @@
       </p:sp>
       <p:sp>
         <p:nvSpPr>
-          <p:cNvPr id="133" name="Google Shape;133;p15"/>
+          <p:cNvPr id="132" name="Google Shape;132;p15"/>
           <p:cNvSpPr txBox="1"/>
           <p:nvPr/>
         </p:nvSpPr>
@@ -13315,14 +13262,14 @@
       </p:sp>
       <p:sp>
         <p:nvSpPr>
-          <p:cNvPr id="134" name="Google Shape;134;p15"/>
+          <p:cNvPr id="133" name="Google Shape;133;p15"/>
           <p:cNvSpPr/>
           <p:nvPr/>
         </p:nvSpPr>
         <p:spPr>
           <a:xfrm>
-            <a:off x="621792" y="2578608"/>
-            <a:ext cx="5376672" cy="1170432"/>
+            <a:off x="595725" y="3777646"/>
+            <a:ext cx="5376600" cy="1170300"/>
           </a:xfrm>
           <a:prstGeom prst="roundRect">
             <a:avLst>
@@ -13381,20 +13328,20 @@
       </p:sp>
       <p:sp>
         <p:nvSpPr>
-          <p:cNvPr id="135" name="Google Shape;135;p15"/>
+          <p:cNvPr id="134" name="Google Shape;134;p15"/>
           <p:cNvSpPr/>
           <p:nvPr/>
         </p:nvSpPr>
         <p:spPr>
           <a:xfrm>
-            <a:off x="621792" y="2578608"/>
-            <a:ext cx="73152" cy="1170432"/>
+            <a:off x="595726" y="3777646"/>
+            <a:ext cx="73200" cy="1170300"/>
           </a:xfrm>
           <a:prstGeom prst="rect">
             <a:avLst/>
           </a:prstGeom>
           <a:solidFill>
-            <a:srgbClr val="25848B"/>
+            <a:srgbClr val="437EAB"/>
           </a:solidFill>
           <a:ln>
             <a:noFill/>
@@ -13439,14 +13386,14 @@
       </p:sp>
       <p:sp>
         <p:nvSpPr>
-          <p:cNvPr id="136" name="Google Shape;136;p15"/>
+          <p:cNvPr id="135" name="Google Shape;135;p15"/>
           <p:cNvSpPr txBox="1"/>
           <p:nvPr/>
         </p:nvSpPr>
         <p:spPr>
           <a:xfrm>
-            <a:off x="841248" y="2724912"/>
-            <a:ext cx="4901184" cy="274320"/>
+            <a:off x="815181" y="3923950"/>
+            <a:ext cx="4901100" cy="274200"/>
           </a:xfrm>
           <a:prstGeom prst="rect">
             <a:avLst/>
@@ -13477,9 +13424,59 @@
                   <a:srgbClr val="183148"/>
                 </a:solidFill>
               </a:rPr>
-              <a:t>CORE · T02</a:t>
+              <a:t>OPTIONAL · T03 &amp; T04-T05</a:t>
             </a:r>
             <a:endParaRPr/>
+          </a:p>
+        </p:txBody>
+      </p:sp>
+      <p:sp>
+        <p:nvSpPr>
+          <p:cNvPr id="136" name="Google Shape;136;p15"/>
+          <p:cNvSpPr txBox="1"/>
+          <p:nvPr/>
+        </p:nvSpPr>
+        <p:spPr>
+          <a:xfrm>
+            <a:off x="815181" y="4253134"/>
+            <a:ext cx="4827900" cy="228600"/>
+          </a:xfrm>
+          <a:prstGeom prst="rect">
+            <a:avLst/>
+          </a:prstGeom>
+          <a:noFill/>
+          <a:ln>
+            <a:noFill/>
+          </a:ln>
+        </p:spPr>
+        <p:txBody>
+          <a:bodyPr anchorCtr="0" anchor="ctr" bIns="18275" lIns="18275" spcFirstLastPara="1" rIns="18275" wrap="square" tIns="18275">
+            <a:noAutofit/>
+          </a:bodyPr>
+          <a:lstStyle/>
+          <a:p>
+            <a:pPr indent="0" lvl="0" marL="0" marR="0" rtl="0" algn="l">
+              <a:spcBef>
+                <a:spcPts val="0"/>
+              </a:spcBef>
+              <a:spcAft>
+                <a:spcPts val="0"/>
+              </a:spcAft>
+              <a:buNone/>
+            </a:pPr>
+            <a:r>
+              <a:rPr b="1" lang="en-US" sz="1200">
+                <a:solidFill>
+                  <a:srgbClr val="437EAB"/>
+                </a:solidFill>
+              </a:rPr>
+              <a:t>MACE Theory · Advanced applications</a:t>
+            </a:r>
+            <a:endParaRPr b="1" sz="1200">
+              <a:solidFill>
+                <a:srgbClr val="437EAB"/>
+              </a:solidFill>
+            </a:endParaRPr>
           </a:p>
         </p:txBody>
       </p:sp>
@@ -13491,54 +13488,8 @@
         </p:nvSpPr>
         <p:spPr>
           <a:xfrm>
-            <a:off x="841248" y="3054096"/>
-            <a:ext cx="4828032" cy="228600"/>
-          </a:xfrm>
-          <a:prstGeom prst="rect">
-            <a:avLst/>
-          </a:prstGeom>
-          <a:noFill/>
-          <a:ln>
-            <a:noFill/>
-          </a:ln>
-        </p:spPr>
-        <p:txBody>
-          <a:bodyPr anchorCtr="0" anchor="ctr" bIns="18275" lIns="18275" spcFirstLastPara="1" rIns="18275" wrap="square" tIns="18275">
-            <a:noAutofit/>
-          </a:bodyPr>
-          <a:lstStyle/>
-          <a:p>
-            <a:pPr indent="0" lvl="0" marL="0" marR="0" rtl="0" algn="l">
-              <a:spcBef>
-                <a:spcPts val="0"/>
-              </a:spcBef>
-              <a:spcAft>
-                <a:spcPts val="0"/>
-              </a:spcAft>
-              <a:buNone/>
-            </a:pPr>
-            <a:r>
-              <a:rPr b="1" lang="en-US" sz="1200">
-                <a:solidFill>
-                  <a:srgbClr val="25848B"/>
-                </a:solidFill>
-              </a:rPr>
-              <a:t>MACE Practice II</a:t>
-            </a:r>
-            <a:endParaRPr/>
-          </a:p>
-        </p:txBody>
-      </p:sp>
-      <p:sp>
-        <p:nvSpPr>
-          <p:cNvPr id="138" name="Google Shape;138;p15"/>
-          <p:cNvSpPr txBox="1"/>
-          <p:nvPr/>
-        </p:nvSpPr>
-        <p:spPr>
-          <a:xfrm>
-            <a:off x="841248" y="3328415"/>
-            <a:ext cx="4828032" cy="256032"/>
+            <a:off x="815181" y="4527453"/>
+            <a:ext cx="4827900" cy="255900"/>
           </a:xfrm>
           <a:prstGeom prst="rect">
             <a:avLst/>
@@ -13569,22 +13520,26 @@
                   <a:srgbClr val="536676"/>
                 </a:solidFill>
               </a:rPr>
-              <a:t>Iterative training · active learning · fine-tuning</a:t>
+              <a:t>Architecture · Li diffusion · molecular NEB · MLIP workflows</a:t>
             </a:r>
-            <a:endParaRPr/>
-          </a:p>
-        </p:txBody>
-      </p:sp>
-      <p:sp>
-        <p:nvSpPr>
-          <p:cNvPr id="139" name="Google Shape;139;p15"/>
+            <a:endParaRPr sz="1200">
+              <a:solidFill>
+                <a:srgbClr val="536676"/>
+              </a:solidFill>
+            </a:endParaRPr>
+          </a:p>
+        </p:txBody>
+      </p:sp>
+      <p:sp>
+        <p:nvSpPr>
+          <p:cNvPr id="138" name="Google Shape;138;p15"/>
           <p:cNvSpPr/>
           <p:nvPr/>
         </p:nvSpPr>
         <p:spPr>
           <a:xfrm>
-            <a:off x="6190488" y="2578608"/>
-            <a:ext cx="5376672" cy="1170432"/>
+            <a:off x="6219301" y="3773078"/>
+            <a:ext cx="5376600" cy="1170300"/>
           </a:xfrm>
           <a:prstGeom prst="roundRect">
             <a:avLst>
@@ -13643,20 +13598,20 @@
       </p:sp>
       <p:sp>
         <p:nvSpPr>
-          <p:cNvPr id="140" name="Google Shape;140;p15"/>
+          <p:cNvPr id="139" name="Google Shape;139;p15"/>
           <p:cNvSpPr/>
           <p:nvPr/>
         </p:nvSpPr>
         <p:spPr>
           <a:xfrm>
-            <a:off x="6190488" y="2578608"/>
-            <a:ext cx="73152" cy="1170432"/>
+            <a:off x="6219301" y="3773078"/>
+            <a:ext cx="73200" cy="1170300"/>
           </a:xfrm>
           <a:prstGeom prst="rect">
             <a:avLst/>
           </a:prstGeom>
           <a:solidFill>
-            <a:srgbClr val="437EAB"/>
+            <a:srgbClr val="488F69"/>
           </a:solidFill>
           <a:ln>
             <a:noFill/>
@@ -13701,538 +13656,14 @@
       </p:sp>
       <p:sp>
         <p:nvSpPr>
-          <p:cNvPr id="141" name="Google Shape;141;p15"/>
+          <p:cNvPr id="140" name="Google Shape;140;p15"/>
           <p:cNvSpPr txBox="1"/>
           <p:nvPr/>
         </p:nvSpPr>
         <p:spPr>
           <a:xfrm>
-            <a:off x="6409944" y="2724912"/>
-            <a:ext cx="4901184" cy="274320"/>
-          </a:xfrm>
-          <a:prstGeom prst="rect">
-            <a:avLst/>
-          </a:prstGeom>
-          <a:noFill/>
-          <a:ln>
-            <a:noFill/>
-          </a:ln>
-        </p:spPr>
-        <p:txBody>
-          <a:bodyPr anchorCtr="0" anchor="ctr" bIns="18275" lIns="18275" spcFirstLastPara="1" rIns="18275" wrap="square" tIns="18275">
-            <a:noAutofit/>
-          </a:bodyPr>
-          <a:lstStyle/>
-          <a:p>
-            <a:pPr indent="0" lvl="0" marL="0" marR="0" rtl="0" algn="l">
-              <a:spcBef>
-                <a:spcPts val="0"/>
-              </a:spcBef>
-              <a:spcAft>
-                <a:spcPts val="0"/>
-              </a:spcAft>
-              <a:buNone/>
-            </a:pPr>
-            <a:r>
-              <a:rPr b="1" lang="en-US" sz="1600">
-                <a:solidFill>
-                  <a:srgbClr val="183148"/>
-                </a:solidFill>
-              </a:rPr>
-              <a:t>OPTIONAL · T03</a:t>
-            </a:r>
-            <a:endParaRPr/>
-          </a:p>
-        </p:txBody>
-      </p:sp>
-      <p:sp>
-        <p:nvSpPr>
-          <p:cNvPr id="142" name="Google Shape;142;p15"/>
-          <p:cNvSpPr txBox="1"/>
-          <p:nvPr/>
-        </p:nvSpPr>
-        <p:spPr>
-          <a:xfrm>
-            <a:off x="6409944" y="3054096"/>
-            <a:ext cx="4828032" cy="228600"/>
-          </a:xfrm>
-          <a:prstGeom prst="rect">
-            <a:avLst/>
-          </a:prstGeom>
-          <a:noFill/>
-          <a:ln>
-            <a:noFill/>
-          </a:ln>
-        </p:spPr>
-        <p:txBody>
-          <a:bodyPr anchorCtr="0" anchor="ctr" bIns="18275" lIns="18275" spcFirstLastPara="1" rIns="18275" wrap="square" tIns="18275">
-            <a:noAutofit/>
-          </a:bodyPr>
-          <a:lstStyle/>
-          <a:p>
-            <a:pPr indent="0" lvl="0" marL="0" marR="0" rtl="0" algn="l">
-              <a:spcBef>
-                <a:spcPts val="0"/>
-              </a:spcBef>
-              <a:spcAft>
-                <a:spcPts val="0"/>
-              </a:spcAft>
-              <a:buNone/>
-            </a:pPr>
-            <a:r>
-              <a:rPr b="1" lang="en-US" sz="1200">
-                <a:solidFill>
-                  <a:srgbClr val="437EAB"/>
-                </a:solidFill>
-              </a:rPr>
-              <a:t>MACE Theory</a:t>
-            </a:r>
-            <a:endParaRPr/>
-          </a:p>
-        </p:txBody>
-      </p:sp>
-      <p:sp>
-        <p:nvSpPr>
-          <p:cNvPr id="143" name="Google Shape;143;p15"/>
-          <p:cNvSpPr txBox="1"/>
-          <p:nvPr/>
-        </p:nvSpPr>
-        <p:spPr>
-          <a:xfrm>
-            <a:off x="6409944" y="3328415"/>
-            <a:ext cx="4828032" cy="256032"/>
-          </a:xfrm>
-          <a:prstGeom prst="rect">
-            <a:avLst/>
-          </a:prstGeom>
-          <a:noFill/>
-          <a:ln>
-            <a:noFill/>
-          </a:ln>
-        </p:spPr>
-        <p:txBody>
-          <a:bodyPr anchorCtr="0" anchor="ctr" bIns="18275" lIns="18275" spcFirstLastPara="1" rIns="18275" wrap="square" tIns="18275">
-            <a:noAutofit/>
-          </a:bodyPr>
-          <a:lstStyle/>
-          <a:p>
-            <a:pPr indent="0" lvl="0" marL="0" marR="0" rtl="0" algn="l">
-              <a:spcBef>
-                <a:spcPts val="0"/>
-              </a:spcBef>
-              <a:spcAft>
-                <a:spcPts val="0"/>
-              </a:spcAft>
-              <a:buNone/>
-            </a:pPr>
-            <a:r>
-              <a:rPr lang="en-US" sz="1200">
-                <a:solidFill>
-                  <a:srgbClr val="536676"/>
-                </a:solidFill>
-              </a:rPr>
-              <a:t>Architecture · Will Baldwin, based on Ilyes Batatia</a:t>
-            </a:r>
-            <a:endParaRPr/>
-          </a:p>
-        </p:txBody>
-      </p:sp>
-      <p:sp>
-        <p:nvSpPr>
-          <p:cNvPr id="144" name="Google Shape;144;p15"/>
-          <p:cNvSpPr/>
-          <p:nvPr/>
-        </p:nvSpPr>
-        <p:spPr>
-          <a:xfrm>
-            <a:off x="621792" y="4014215"/>
-            <a:ext cx="5376672" cy="1170432"/>
-          </a:xfrm>
-          <a:prstGeom prst="roundRect">
-            <a:avLst>
-              <a:gd fmla="val 8000" name="adj"/>
-            </a:avLst>
-          </a:prstGeom>
-          <a:solidFill>
-            <a:srgbClr val="FFFFFF"/>
-          </a:solidFill>
-          <a:ln cap="flat" cmpd="sng" w="15225">
-            <a:solidFill>
-              <a:srgbClr val="E9EFF4"/>
-            </a:solidFill>
-            <a:prstDash val="solid"/>
-            <a:round/>
-            <a:headEnd len="sm" w="sm" type="none"/>
-            <a:tailEnd len="sm" w="sm" type="none"/>
-          </a:ln>
-          <a:effectLst>
-            <a:outerShdw blurRad="40000" rotWithShape="0" dir="5400000" dist="23000">
-              <a:srgbClr val="000000">
-                <a:alpha val="34902"/>
-              </a:srgbClr>
-            </a:outerShdw>
-          </a:effectLst>
-        </p:spPr>
-        <p:txBody>
-          <a:bodyPr anchorCtr="0" anchor="ctr" bIns="45700" lIns="91425" spcFirstLastPara="1" rIns="91425" wrap="square" tIns="45700">
-            <a:noAutofit/>
-          </a:bodyPr>
-          <a:lstStyle/>
-          <a:p>
-            <a:pPr indent="0" lvl="0" marL="0" marR="0" rtl="0" algn="ctr">
-              <a:spcBef>
-                <a:spcPts val="0"/>
-              </a:spcBef>
-              <a:spcAft>
-                <a:spcPts val="0"/>
-              </a:spcAft>
-              <a:buNone/>
-            </a:pPr>
-            <a:r>
-              <a:t/>
-            </a:r>
-            <a:endParaRPr b="0" i="0" sz="1800" u="none" cap="none" strike="noStrike">
-              <a:solidFill>
-                <a:schemeClr val="dk1"/>
-              </a:solidFill>
-              <a:latin typeface="Calibri"/>
-              <a:ea typeface="Calibri"/>
-              <a:cs typeface="Calibri"/>
-              <a:sym typeface="Calibri"/>
-            </a:endParaRPr>
-          </a:p>
-        </p:txBody>
-      </p:sp>
-      <p:sp>
-        <p:nvSpPr>
-          <p:cNvPr id="145" name="Google Shape;145;p15"/>
-          <p:cNvSpPr/>
-          <p:nvPr/>
-        </p:nvSpPr>
-        <p:spPr>
-          <a:xfrm>
-            <a:off x="621792" y="4014215"/>
-            <a:ext cx="73152" cy="1170432"/>
-          </a:xfrm>
-          <a:prstGeom prst="rect">
-            <a:avLst/>
-          </a:prstGeom>
-          <a:solidFill>
-            <a:srgbClr val="BF554E"/>
-          </a:solidFill>
-          <a:ln>
-            <a:noFill/>
-          </a:ln>
-          <a:effectLst>
-            <a:outerShdw blurRad="40000" rotWithShape="0" dir="5400000" dist="23000">
-              <a:srgbClr val="000000">
-                <a:alpha val="34902"/>
-              </a:srgbClr>
-            </a:outerShdw>
-          </a:effectLst>
-        </p:spPr>
-        <p:txBody>
-          <a:bodyPr anchorCtr="0" anchor="ctr" bIns="45700" lIns="91425" spcFirstLastPara="1" rIns="91425" wrap="square" tIns="45700">
-            <a:noAutofit/>
-          </a:bodyPr>
-          <a:lstStyle/>
-          <a:p>
-            <a:pPr indent="0" lvl="0" marL="0" marR="0" rtl="0" algn="ctr">
-              <a:spcBef>
-                <a:spcPts val="0"/>
-              </a:spcBef>
-              <a:spcAft>
-                <a:spcPts val="0"/>
-              </a:spcAft>
-              <a:buNone/>
-            </a:pPr>
-            <a:r>
-              <a:t/>
-            </a:r>
-            <a:endParaRPr b="0" i="0" sz="1800" u="none" cap="none" strike="noStrike">
-              <a:solidFill>
-                <a:schemeClr val="dk1"/>
-              </a:solidFill>
-              <a:latin typeface="Calibri"/>
-              <a:ea typeface="Calibri"/>
-              <a:cs typeface="Calibri"/>
-              <a:sym typeface="Calibri"/>
-            </a:endParaRPr>
-          </a:p>
-        </p:txBody>
-      </p:sp>
-      <p:sp>
-        <p:nvSpPr>
-          <p:cNvPr id="146" name="Google Shape;146;p15"/>
-          <p:cNvSpPr txBox="1"/>
-          <p:nvPr/>
-        </p:nvSpPr>
-        <p:spPr>
-          <a:xfrm>
-            <a:off x="841248" y="4160520"/>
-            <a:ext cx="4901184" cy="274320"/>
-          </a:xfrm>
-          <a:prstGeom prst="rect">
-            <a:avLst/>
-          </a:prstGeom>
-          <a:noFill/>
-          <a:ln>
-            <a:noFill/>
-          </a:ln>
-        </p:spPr>
-        <p:txBody>
-          <a:bodyPr anchorCtr="0" anchor="ctr" bIns="18275" lIns="18275" spcFirstLastPara="1" rIns="18275" wrap="square" tIns="18275">
-            <a:noAutofit/>
-          </a:bodyPr>
-          <a:lstStyle/>
-          <a:p>
-            <a:pPr indent="0" lvl="0" marL="0" marR="0" rtl="0" algn="l">
-              <a:spcBef>
-                <a:spcPts val="0"/>
-              </a:spcBef>
-              <a:spcAft>
-                <a:spcPts val="0"/>
-              </a:spcAft>
-              <a:buNone/>
-            </a:pPr>
-            <a:r>
-              <a:rPr b="1" lang="en-US" sz="1600">
-                <a:solidFill>
-                  <a:srgbClr val="183148"/>
-                </a:solidFill>
-              </a:rPr>
-              <a:t>OPTIONAL · T04–T05</a:t>
-            </a:r>
-            <a:endParaRPr/>
-          </a:p>
-        </p:txBody>
-      </p:sp>
-      <p:sp>
-        <p:nvSpPr>
-          <p:cNvPr id="147" name="Google Shape;147;p15"/>
-          <p:cNvSpPr txBox="1"/>
-          <p:nvPr/>
-        </p:nvSpPr>
-        <p:spPr>
-          <a:xfrm>
-            <a:off x="841248" y="4489704"/>
-            <a:ext cx="4828032" cy="228600"/>
-          </a:xfrm>
-          <a:prstGeom prst="rect">
-            <a:avLst/>
-          </a:prstGeom>
-          <a:noFill/>
-          <a:ln>
-            <a:noFill/>
-          </a:ln>
-        </p:spPr>
-        <p:txBody>
-          <a:bodyPr anchorCtr="0" anchor="ctr" bIns="18275" lIns="18275" spcFirstLastPara="1" rIns="18275" wrap="square" tIns="18275">
-            <a:noAutofit/>
-          </a:bodyPr>
-          <a:lstStyle/>
-          <a:p>
-            <a:pPr indent="0" lvl="0" marL="0" marR="0" rtl="0" algn="l">
-              <a:spcBef>
-                <a:spcPts val="0"/>
-              </a:spcBef>
-              <a:spcAft>
-                <a:spcPts val="0"/>
-              </a:spcAft>
-              <a:buNone/>
-            </a:pPr>
-            <a:r>
-              <a:rPr b="1" lang="en-US" sz="1200">
-                <a:solidFill>
-                  <a:srgbClr val="BF554E"/>
-                </a:solidFill>
-              </a:rPr>
-              <a:t>Advanced applications</a:t>
-            </a:r>
-            <a:endParaRPr/>
-          </a:p>
-        </p:txBody>
-      </p:sp>
-      <p:sp>
-        <p:nvSpPr>
-          <p:cNvPr id="148" name="Google Shape;148;p15"/>
-          <p:cNvSpPr txBox="1"/>
-          <p:nvPr/>
-        </p:nvSpPr>
-        <p:spPr>
-          <a:xfrm>
-            <a:off x="841248" y="4764024"/>
-            <a:ext cx="4828032" cy="256032"/>
-          </a:xfrm>
-          <a:prstGeom prst="rect">
-            <a:avLst/>
-          </a:prstGeom>
-          <a:noFill/>
-          <a:ln>
-            <a:noFill/>
-          </a:ln>
-        </p:spPr>
-        <p:txBody>
-          <a:bodyPr anchorCtr="0" anchor="ctr" bIns="18275" lIns="18275" spcFirstLastPara="1" rIns="18275" wrap="square" tIns="18275">
-            <a:noAutofit/>
-          </a:bodyPr>
-          <a:lstStyle/>
-          <a:p>
-            <a:pPr indent="0" lvl="0" marL="0" marR="0" rtl="0" algn="l">
-              <a:spcBef>
-                <a:spcPts val="0"/>
-              </a:spcBef>
-              <a:spcAft>
-                <a:spcPts val="0"/>
-              </a:spcAft>
-              <a:buNone/>
-            </a:pPr>
-            <a:r>
-              <a:rPr lang="en-US" sz="1200">
-                <a:solidFill>
-                  <a:srgbClr val="536676"/>
-                </a:solidFill>
-              </a:rPr>
-              <a:t>Li diffusion · molecular NEB · MLIP workflows</a:t>
-            </a:r>
-            <a:endParaRPr/>
-          </a:p>
-        </p:txBody>
-      </p:sp>
-      <p:sp>
-        <p:nvSpPr>
-          <p:cNvPr id="149" name="Google Shape;149;p15"/>
-          <p:cNvSpPr/>
-          <p:nvPr/>
-        </p:nvSpPr>
-        <p:spPr>
-          <a:xfrm>
-            <a:off x="6190488" y="4014215"/>
-            <a:ext cx="5376672" cy="1170432"/>
-          </a:xfrm>
-          <a:prstGeom prst="roundRect">
-            <a:avLst>
-              <a:gd fmla="val 8000" name="adj"/>
-            </a:avLst>
-          </a:prstGeom>
-          <a:solidFill>
-            <a:srgbClr val="FFFFFF"/>
-          </a:solidFill>
-          <a:ln cap="flat" cmpd="sng" w="15225">
-            <a:solidFill>
-              <a:srgbClr val="E9EFF4"/>
-            </a:solidFill>
-            <a:prstDash val="solid"/>
-            <a:round/>
-            <a:headEnd len="sm" w="sm" type="none"/>
-            <a:tailEnd len="sm" w="sm" type="none"/>
-          </a:ln>
-          <a:effectLst>
-            <a:outerShdw blurRad="40000" rotWithShape="0" dir="5400000" dist="23000">
-              <a:srgbClr val="000000">
-                <a:alpha val="34902"/>
-              </a:srgbClr>
-            </a:outerShdw>
-          </a:effectLst>
-        </p:spPr>
-        <p:txBody>
-          <a:bodyPr anchorCtr="0" anchor="ctr" bIns="45700" lIns="91425" spcFirstLastPara="1" rIns="91425" wrap="square" tIns="45700">
-            <a:noAutofit/>
-          </a:bodyPr>
-          <a:lstStyle/>
-          <a:p>
-            <a:pPr indent="0" lvl="0" marL="0" marR="0" rtl="0" algn="ctr">
-              <a:spcBef>
-                <a:spcPts val="0"/>
-              </a:spcBef>
-              <a:spcAft>
-                <a:spcPts val="0"/>
-              </a:spcAft>
-              <a:buNone/>
-            </a:pPr>
-            <a:r>
-              <a:t/>
-            </a:r>
-            <a:endParaRPr b="0" i="0" sz="1800" u="none" cap="none" strike="noStrike">
-              <a:solidFill>
-                <a:schemeClr val="dk1"/>
-              </a:solidFill>
-              <a:latin typeface="Calibri"/>
-              <a:ea typeface="Calibri"/>
-              <a:cs typeface="Calibri"/>
-              <a:sym typeface="Calibri"/>
-            </a:endParaRPr>
-          </a:p>
-        </p:txBody>
-      </p:sp>
-      <p:sp>
-        <p:nvSpPr>
-          <p:cNvPr id="150" name="Google Shape;150;p15"/>
-          <p:cNvSpPr/>
-          <p:nvPr/>
-        </p:nvSpPr>
-        <p:spPr>
-          <a:xfrm>
-            <a:off x="6190488" y="4014215"/>
-            <a:ext cx="73152" cy="1170432"/>
-          </a:xfrm>
-          <a:prstGeom prst="rect">
-            <a:avLst/>
-          </a:prstGeom>
-          <a:solidFill>
-            <a:srgbClr val="488F69"/>
-          </a:solidFill>
-          <a:ln>
-            <a:noFill/>
-          </a:ln>
-          <a:effectLst>
-            <a:outerShdw blurRad="40000" rotWithShape="0" dir="5400000" dist="23000">
-              <a:srgbClr val="000000">
-                <a:alpha val="34902"/>
-              </a:srgbClr>
-            </a:outerShdw>
-          </a:effectLst>
-        </p:spPr>
-        <p:txBody>
-          <a:bodyPr anchorCtr="0" anchor="ctr" bIns="45700" lIns="91425" spcFirstLastPara="1" rIns="91425" wrap="square" tIns="45700">
-            <a:noAutofit/>
-          </a:bodyPr>
-          <a:lstStyle/>
-          <a:p>
-            <a:pPr indent="0" lvl="0" marL="0" marR="0" rtl="0" algn="ctr">
-              <a:spcBef>
-                <a:spcPts val="0"/>
-              </a:spcBef>
-              <a:spcAft>
-                <a:spcPts val="0"/>
-              </a:spcAft>
-              <a:buNone/>
-            </a:pPr>
-            <a:r>
-              <a:t/>
-            </a:r>
-            <a:endParaRPr b="0" i="0" sz="1800" u="none" cap="none" strike="noStrike">
-              <a:solidFill>
-                <a:schemeClr val="dk1"/>
-              </a:solidFill>
-              <a:latin typeface="Calibri"/>
-              <a:ea typeface="Calibri"/>
-              <a:cs typeface="Calibri"/>
-              <a:sym typeface="Calibri"/>
-            </a:endParaRPr>
-          </a:p>
-        </p:txBody>
-      </p:sp>
-      <p:sp>
-        <p:nvSpPr>
-          <p:cNvPr id="151" name="Google Shape;151;p15"/>
-          <p:cNvSpPr txBox="1"/>
-          <p:nvPr/>
-        </p:nvSpPr>
-        <p:spPr>
-          <a:xfrm>
-            <a:off x="6409944" y="4160520"/>
-            <a:ext cx="4901184" cy="274320"/>
+            <a:off x="6438757" y="3919383"/>
+            <a:ext cx="4901100" cy="274200"/>
           </a:xfrm>
           <a:prstGeom prst="rect">
             <a:avLst/>
@@ -14271,14 +13702,14 @@
       </p:sp>
       <p:sp>
         <p:nvSpPr>
-          <p:cNvPr id="152" name="Google Shape;152;p15"/>
+          <p:cNvPr id="141" name="Google Shape;141;p15"/>
           <p:cNvSpPr txBox="1"/>
           <p:nvPr/>
         </p:nvSpPr>
         <p:spPr>
           <a:xfrm>
-            <a:off x="6409944" y="4489704"/>
-            <a:ext cx="4828032" cy="228600"/>
+            <a:off x="6438757" y="4248567"/>
+            <a:ext cx="4827900" cy="228600"/>
           </a:xfrm>
           <a:prstGeom prst="rect">
             <a:avLst/>
@@ -14317,14 +13748,14 @@
       </p:sp>
       <p:sp>
         <p:nvSpPr>
-          <p:cNvPr id="153" name="Google Shape;153;p15"/>
+          <p:cNvPr id="142" name="Google Shape;142;p15"/>
           <p:cNvSpPr txBox="1"/>
           <p:nvPr/>
         </p:nvSpPr>
         <p:spPr>
           <a:xfrm>
-            <a:off x="6409944" y="4764024"/>
-            <a:ext cx="4828032" cy="256032"/>
+            <a:off x="6438757" y="4522887"/>
+            <a:ext cx="4827900" cy="255900"/>
           </a:xfrm>
           <a:prstGeom prst="rect">
             <a:avLst/>
@@ -14363,14 +13794,14 @@
       </p:sp>
       <p:sp>
         <p:nvSpPr>
-          <p:cNvPr id="154" name="Google Shape;154;p15"/>
+          <p:cNvPr id="143" name="Google Shape;143;p15"/>
           <p:cNvSpPr txBox="1"/>
           <p:nvPr/>
         </p:nvSpPr>
         <p:spPr>
           <a:xfrm>
-            <a:off x="658368" y="5605272"/>
-            <a:ext cx="10789920" cy="393192"/>
+            <a:off x="658356" y="5317810"/>
+            <a:ext cx="10789800" cy="393300"/>
           </a:xfrm>
           <a:prstGeom prst="rect">
             <a:avLst/>
@@ -14409,7 +13840,7 @@
       </p:sp>
       <p:sp>
         <p:nvSpPr>
-          <p:cNvPr id="155" name="Google Shape;155;p15"/>
+          <p:cNvPr id="144" name="Google Shape;144;p15"/>
           <p:cNvSpPr txBox="1"/>
           <p:nvPr/>
         </p:nvSpPr>
@@ -14472,6 +13903,264 @@
                 </a:solidFill>
               </a:rPr>
               <a:t>Source notebooks: Ioan Magdău, Ilyes Batatia and Will Baldwin; refined by Ioan Magdău and Alin Elena. Extensions: Bradley Martin.</a:t>
+            </a:r>
+            <a:endParaRPr/>
+          </a:p>
+        </p:txBody>
+      </p:sp>
+      <p:sp>
+        <p:nvSpPr>
+          <p:cNvPr id="145" name="Google Shape;145;p15"/>
+          <p:cNvSpPr/>
+          <p:nvPr/>
+        </p:nvSpPr>
+        <p:spPr>
+          <a:xfrm>
+            <a:off x="621717" y="2457478"/>
+            <a:ext cx="10945500" cy="804600"/>
+          </a:xfrm>
+          <a:prstGeom prst="roundRect">
+            <a:avLst>
+              <a:gd fmla="val 8000" name="adj"/>
+            </a:avLst>
+          </a:prstGeom>
+          <a:solidFill>
+            <a:srgbClr val="183148"/>
+          </a:solidFill>
+          <a:ln>
+            <a:noFill/>
+          </a:ln>
+          <a:effectLst>
+            <a:outerShdw blurRad="40000" rotWithShape="0" dir="5400000" dist="23000">
+              <a:srgbClr val="000000">
+                <a:alpha val="34900"/>
+              </a:srgbClr>
+            </a:outerShdw>
+          </a:effectLst>
+        </p:spPr>
+        <p:txBody>
+          <a:bodyPr anchorCtr="0" anchor="ctr" bIns="45700" lIns="91425" spcFirstLastPara="1" rIns="91425" wrap="square" tIns="45700">
+            <a:noAutofit/>
+          </a:bodyPr>
+          <a:lstStyle/>
+          <a:p>
+            <a:pPr indent="0" lvl="0" marL="0" marR="0" rtl="0" algn="ctr">
+              <a:spcBef>
+                <a:spcPts val="0"/>
+              </a:spcBef>
+              <a:spcAft>
+                <a:spcPts val="0"/>
+              </a:spcAft>
+              <a:buNone/>
+            </a:pPr>
+            <a:r>
+              <a:t/>
+            </a:r>
+            <a:endParaRPr b="0" i="0" sz="1800" u="none" cap="none" strike="noStrike">
+              <a:solidFill>
+                <a:schemeClr val="dk1"/>
+              </a:solidFill>
+              <a:latin typeface="Calibri"/>
+              <a:ea typeface="Calibri"/>
+              <a:cs typeface="Calibri"/>
+              <a:sym typeface="Calibri"/>
+            </a:endParaRPr>
+          </a:p>
+        </p:txBody>
+      </p:sp>
+      <p:sp>
+        <p:nvSpPr>
+          <p:cNvPr id="146" name="Google Shape;146;p15"/>
+          <p:cNvSpPr/>
+          <p:nvPr/>
+        </p:nvSpPr>
+        <p:spPr>
+          <a:xfrm>
+            <a:off x="841173" y="2640358"/>
+            <a:ext cx="640200" cy="420600"/>
+          </a:xfrm>
+          <a:prstGeom prst="roundRect">
+            <a:avLst>
+              <a:gd fmla="val 8000" name="adj"/>
+            </a:avLst>
+          </a:prstGeom>
+          <a:solidFill>
+            <a:srgbClr val="25848B"/>
+          </a:solidFill>
+          <a:ln>
+            <a:noFill/>
+          </a:ln>
+          <a:effectLst>
+            <a:outerShdw blurRad="40000" rotWithShape="0" dir="5400000" dist="23000">
+              <a:srgbClr val="000000">
+                <a:alpha val="34900"/>
+              </a:srgbClr>
+            </a:outerShdw>
+          </a:effectLst>
+        </p:spPr>
+        <p:txBody>
+          <a:bodyPr anchorCtr="0" anchor="ctr" bIns="45700" lIns="91425" spcFirstLastPara="1" rIns="91425" wrap="square" tIns="45700">
+            <a:noAutofit/>
+          </a:bodyPr>
+          <a:lstStyle/>
+          <a:p>
+            <a:pPr indent="0" lvl="0" marL="0" marR="0" rtl="0" algn="ctr">
+              <a:spcBef>
+                <a:spcPts val="0"/>
+              </a:spcBef>
+              <a:spcAft>
+                <a:spcPts val="0"/>
+              </a:spcAft>
+              <a:buNone/>
+            </a:pPr>
+            <a:r>
+              <a:t/>
+            </a:r>
+            <a:endParaRPr b="0" i="0" sz="1800" u="none" cap="none" strike="noStrike">
+              <a:solidFill>
+                <a:schemeClr val="dk1"/>
+              </a:solidFill>
+              <a:latin typeface="Calibri"/>
+              <a:ea typeface="Calibri"/>
+              <a:cs typeface="Calibri"/>
+              <a:sym typeface="Calibri"/>
+            </a:endParaRPr>
+          </a:p>
+        </p:txBody>
+      </p:sp>
+      <p:sp>
+        <p:nvSpPr>
+          <p:cNvPr id="147" name="Google Shape;147;p15"/>
+          <p:cNvSpPr txBox="1"/>
+          <p:nvPr/>
+        </p:nvSpPr>
+        <p:spPr>
+          <a:xfrm>
+            <a:off x="841173" y="2658646"/>
+            <a:ext cx="640200" cy="365700"/>
+          </a:xfrm>
+          <a:prstGeom prst="rect">
+            <a:avLst/>
+          </a:prstGeom>
+          <a:noFill/>
+          <a:ln>
+            <a:noFill/>
+          </a:ln>
+        </p:spPr>
+        <p:txBody>
+          <a:bodyPr anchorCtr="0" anchor="ctr" bIns="18275" lIns="18275" spcFirstLastPara="1" rIns="18275" wrap="square" tIns="18275">
+            <a:noAutofit/>
+          </a:bodyPr>
+          <a:lstStyle/>
+          <a:p>
+            <a:pPr indent="0" lvl="0" marL="0" marR="0" rtl="0" algn="ctr">
+              <a:spcBef>
+                <a:spcPts val="0"/>
+              </a:spcBef>
+              <a:spcAft>
+                <a:spcPts val="0"/>
+              </a:spcAft>
+              <a:buNone/>
+            </a:pPr>
+            <a:r>
+              <a:rPr b="1" lang="en-US">
+                <a:solidFill>
+                  <a:srgbClr val="FFFFFF"/>
+                </a:solidFill>
+              </a:rPr>
+              <a:t>T02</a:t>
+            </a:r>
+            <a:endParaRPr/>
+          </a:p>
+        </p:txBody>
+      </p:sp>
+      <p:sp>
+        <p:nvSpPr>
+          <p:cNvPr id="148" name="Google Shape;148;p15"/>
+          <p:cNvSpPr txBox="1"/>
+          <p:nvPr/>
+        </p:nvSpPr>
+        <p:spPr>
+          <a:xfrm>
+            <a:off x="1718997" y="2548918"/>
+            <a:ext cx="2926200" cy="274200"/>
+          </a:xfrm>
+          <a:prstGeom prst="rect">
+            <a:avLst/>
+          </a:prstGeom>
+          <a:noFill/>
+          <a:ln>
+            <a:noFill/>
+          </a:ln>
+        </p:spPr>
+        <p:txBody>
+          <a:bodyPr anchorCtr="0" anchor="ctr" bIns="18275" lIns="18275" spcFirstLastPara="1" rIns="18275" wrap="square" tIns="18275">
+            <a:noAutofit/>
+          </a:bodyPr>
+          <a:lstStyle/>
+          <a:p>
+            <a:pPr indent="0" lvl="0" marL="0" marR="0" rtl="0" algn="l">
+              <a:spcBef>
+                <a:spcPts val="0"/>
+              </a:spcBef>
+              <a:spcAft>
+                <a:spcPts val="0"/>
+              </a:spcAft>
+              <a:buNone/>
+            </a:pPr>
+            <a:r>
+              <a:rPr b="1" lang="en-US" sz="1100">
+                <a:solidFill>
+                  <a:srgbClr val="87D9D7"/>
+                </a:solidFill>
+              </a:rPr>
+              <a:t>MACE Practice II</a:t>
+            </a:r>
+            <a:endParaRPr/>
+          </a:p>
+        </p:txBody>
+      </p:sp>
+      <p:sp>
+        <p:nvSpPr>
+          <p:cNvPr id="149" name="Google Shape;149;p15"/>
+          <p:cNvSpPr txBox="1"/>
+          <p:nvPr/>
+        </p:nvSpPr>
+        <p:spPr>
+          <a:xfrm>
+            <a:off x="1718997" y="2823238"/>
+            <a:ext cx="9052500" cy="292500"/>
+          </a:xfrm>
+          <a:prstGeom prst="rect">
+            <a:avLst/>
+          </a:prstGeom>
+          <a:noFill/>
+          <a:ln>
+            <a:noFill/>
+          </a:ln>
+        </p:spPr>
+        <p:txBody>
+          <a:bodyPr anchorCtr="0" anchor="ctr" bIns="18275" lIns="18275" spcFirstLastPara="1" rIns="18275" wrap="square" tIns="18275">
+            <a:noAutofit/>
+          </a:bodyPr>
+          <a:lstStyle/>
+          <a:p>
+            <a:pPr indent="0" lvl="0" marL="0" marR="0" rtl="0" algn="l">
+              <a:spcBef>
+                <a:spcPts val="0"/>
+              </a:spcBef>
+              <a:spcAft>
+                <a:spcPts val="0"/>
+              </a:spcAft>
+              <a:buNone/>
+            </a:pPr>
+            <a:r>
+              <a:rPr b="1" lang="en-US" sz="1600">
+                <a:solidFill>
+                  <a:srgbClr val="FFFFFF"/>
+                </a:solidFill>
+              </a:rPr>
+              <a:t>Iterative training · active learning · fine-tuning a MACE model</a:t>
             </a:r>
             <a:endParaRPr/>
           </a:p>
@@ -14497,7 +14186,7 @@
     </p:bg>
     <p:spTree>
       <p:nvGrpSpPr>
-        <p:cNvPr id="159" name="Shape 159"/>
+        <p:cNvPr id="153" name="Shape 153"/>
         <p:cNvGrpSpPr/>
         <p:nvPr/>
       </p:nvGrpSpPr>
@@ -14511,7 +14200,7 @@
       </p:grpSpPr>
       <p:sp>
         <p:nvSpPr>
-          <p:cNvPr id="160" name="Google Shape;160;p16"/>
+          <p:cNvPr id="154" name="Google Shape;154;p16"/>
           <p:cNvSpPr/>
           <p:nvPr/>
         </p:nvSpPr>
@@ -14569,7 +14258,7 @@
       </p:sp>
       <p:sp>
         <p:nvSpPr>
-          <p:cNvPr id="161" name="Google Shape;161;p16"/>
+          <p:cNvPr id="155" name="Google Shape;155;p16"/>
           <p:cNvSpPr txBox="1"/>
           <p:nvPr/>
         </p:nvSpPr>
@@ -14619,7 +14308,7 @@
       </p:sp>
       <p:sp>
         <p:nvSpPr>
-          <p:cNvPr id="162" name="Google Shape;162;p16"/>
+          <p:cNvPr id="156" name="Google Shape;156;p16"/>
           <p:cNvSpPr txBox="1"/>
           <p:nvPr/>
         </p:nvSpPr>
@@ -14665,7 +14354,7 @@
       </p:sp>
       <p:sp>
         <p:nvSpPr>
-          <p:cNvPr id="163" name="Google Shape;163;p16"/>
+          <p:cNvPr id="157" name="Google Shape;157;p16"/>
           <p:cNvSpPr txBox="1"/>
           <p:nvPr/>
         </p:nvSpPr>
@@ -14715,7 +14404,7 @@
       </p:sp>
       <p:sp>
         <p:nvSpPr>
-          <p:cNvPr id="164" name="Google Shape;164;p16"/>
+          <p:cNvPr id="158" name="Google Shape;158;p16"/>
           <p:cNvSpPr txBox="1"/>
           <p:nvPr/>
         </p:nvSpPr>
@@ -14761,7 +14450,7 @@
       </p:sp>
       <p:sp>
         <p:nvSpPr>
-          <p:cNvPr id="165" name="Google Shape;165;p16"/>
+          <p:cNvPr id="159" name="Google Shape;159;p16"/>
           <p:cNvSpPr txBox="1"/>
           <p:nvPr/>
         </p:nvSpPr>
@@ -14807,7 +14496,7 @@
       </p:sp>
       <p:sp>
         <p:nvSpPr>
-          <p:cNvPr id="166" name="Google Shape;166;p16"/>
+          <p:cNvPr id="160" name="Google Shape;160;p16"/>
           <p:cNvSpPr/>
           <p:nvPr/>
         </p:nvSpPr>
@@ -14873,7 +14562,7 @@
       </p:sp>
       <p:sp>
         <p:nvSpPr>
-          <p:cNvPr id="167" name="Google Shape;167;p16"/>
+          <p:cNvPr id="161" name="Google Shape;161;p16"/>
           <p:cNvSpPr/>
           <p:nvPr/>
         </p:nvSpPr>
@@ -14931,7 +14620,7 @@
       </p:sp>
       <p:sp>
         <p:nvSpPr>
-          <p:cNvPr id="168" name="Google Shape;168;p16"/>
+          <p:cNvPr id="162" name="Google Shape;162;p16"/>
           <p:cNvSpPr txBox="1"/>
           <p:nvPr/>
         </p:nvSpPr>
@@ -14981,7 +14670,7 @@
       </p:sp>
       <p:sp>
         <p:nvSpPr>
-          <p:cNvPr id="169" name="Google Shape;169;p16"/>
+          <p:cNvPr id="163" name="Google Shape;163;p16"/>
           <p:cNvSpPr txBox="1"/>
           <p:nvPr/>
         </p:nvSpPr>
@@ -15054,7 +14743,7 @@
       </p:sp>
       <p:sp>
         <p:nvSpPr>
-          <p:cNvPr id="170" name="Google Shape;170;p16"/>
+          <p:cNvPr id="164" name="Google Shape;164;p16"/>
           <p:cNvSpPr/>
           <p:nvPr/>
         </p:nvSpPr>
@@ -15120,7 +14809,7 @@
       </p:sp>
       <p:sp>
         <p:nvSpPr>
-          <p:cNvPr id="171" name="Google Shape;171;p16"/>
+          <p:cNvPr id="165" name="Google Shape;165;p16"/>
           <p:cNvSpPr/>
           <p:nvPr/>
         </p:nvSpPr>
@@ -15178,7 +14867,7 @@
       </p:sp>
       <p:sp>
         <p:nvSpPr>
-          <p:cNvPr id="172" name="Google Shape;172;p16"/>
+          <p:cNvPr id="166" name="Google Shape;166;p16"/>
           <p:cNvSpPr txBox="1"/>
           <p:nvPr/>
         </p:nvSpPr>
@@ -15228,7 +14917,7 @@
       </p:sp>
       <p:sp>
         <p:nvSpPr>
-          <p:cNvPr id="173" name="Google Shape;173;p16"/>
+          <p:cNvPr id="167" name="Google Shape;167;p16"/>
           <p:cNvSpPr txBox="1"/>
           <p:nvPr/>
         </p:nvSpPr>
@@ -15301,7 +14990,7 @@
       </p:sp>
       <p:sp>
         <p:nvSpPr>
-          <p:cNvPr id="174" name="Google Shape;174;p16"/>
+          <p:cNvPr id="168" name="Google Shape;168;p16"/>
           <p:cNvSpPr/>
           <p:nvPr/>
         </p:nvSpPr>
@@ -15367,7 +15056,7 @@
       </p:sp>
       <p:sp>
         <p:nvSpPr>
-          <p:cNvPr id="175" name="Google Shape;175;p16"/>
+          <p:cNvPr id="169" name="Google Shape;169;p16"/>
           <p:cNvSpPr/>
           <p:nvPr/>
         </p:nvSpPr>
@@ -15425,7 +15114,7 @@
       </p:sp>
       <p:sp>
         <p:nvSpPr>
-          <p:cNvPr id="176" name="Google Shape;176;p16"/>
+          <p:cNvPr id="170" name="Google Shape;170;p16"/>
           <p:cNvSpPr txBox="1"/>
           <p:nvPr/>
         </p:nvSpPr>
@@ -15475,7 +15164,7 @@
       </p:sp>
       <p:sp>
         <p:nvSpPr>
-          <p:cNvPr id="177" name="Google Shape;177;p16"/>
+          <p:cNvPr id="171" name="Google Shape;171;p16"/>
           <p:cNvSpPr txBox="1"/>
           <p:nvPr/>
         </p:nvSpPr>
@@ -15548,7 +15237,7 @@
       </p:sp>
       <p:cxnSp>
         <p:nvCxnSpPr>
-          <p:cNvPr id="178" name="Google Shape;178;p16"/>
+          <p:cNvPr id="172" name="Google Shape;172;p16"/>
           <p:cNvCxnSpPr/>
           <p:nvPr/>
         </p:nvCxnSpPr>
@@ -15581,7 +15270,7 @@
       </p:cxnSp>
       <p:cxnSp>
         <p:nvCxnSpPr>
-          <p:cNvPr id="179" name="Google Shape;179;p16"/>
+          <p:cNvPr id="173" name="Google Shape;173;p16"/>
           <p:cNvCxnSpPr/>
           <p:nvPr/>
         </p:nvCxnSpPr>
@@ -15614,7 +15303,7 @@
       </p:cxnSp>
       <p:sp>
         <p:nvSpPr>
-          <p:cNvPr id="180" name="Google Shape;180;p16"/>
+          <p:cNvPr id="174" name="Google Shape;174;p16"/>
           <p:cNvSpPr txBox="1"/>
           <p:nvPr/>
         </p:nvSpPr>
@@ -15660,7 +15349,7 @@
       </p:sp>
       <p:sp>
         <p:nvSpPr>
-          <p:cNvPr id="181" name="Google Shape;181;p16"/>
+          <p:cNvPr id="175" name="Google Shape;175;p16"/>
           <p:cNvSpPr/>
           <p:nvPr/>
         </p:nvSpPr>
@@ -15720,7 +15409,7 @@
       </p:sp>
       <p:sp>
         <p:nvSpPr>
-          <p:cNvPr id="182" name="Google Shape;182;p16"/>
+          <p:cNvPr id="176" name="Google Shape;176;p16"/>
           <p:cNvSpPr txBox="1"/>
           <p:nvPr/>
         </p:nvSpPr>
@@ -15770,7 +15459,7 @@
       </p:sp>
       <p:sp>
         <p:nvSpPr>
-          <p:cNvPr id="183" name="Google Shape;183;p16"/>
+          <p:cNvPr id="177" name="Google Shape;177;p16"/>
           <p:cNvSpPr txBox="1"/>
           <p:nvPr/>
         </p:nvSpPr>
@@ -15820,7 +15509,7 @@
       </p:sp>
       <p:sp>
         <p:nvSpPr>
-          <p:cNvPr id="184" name="Google Shape;184;p16"/>
+          <p:cNvPr id="178" name="Google Shape;178;p16"/>
           <p:cNvSpPr/>
           <p:nvPr/>
         </p:nvSpPr>
@@ -15880,7 +15569,7 @@
       </p:sp>
       <p:sp>
         <p:nvSpPr>
-          <p:cNvPr id="185" name="Google Shape;185;p16"/>
+          <p:cNvPr id="179" name="Google Shape;179;p16"/>
           <p:cNvSpPr txBox="1"/>
           <p:nvPr/>
         </p:nvSpPr>
@@ -15930,7 +15619,7 @@
       </p:sp>
       <p:sp>
         <p:nvSpPr>
-          <p:cNvPr id="186" name="Google Shape;186;p16"/>
+          <p:cNvPr id="180" name="Google Shape;180;p16"/>
           <p:cNvSpPr txBox="1"/>
           <p:nvPr/>
         </p:nvSpPr>
@@ -15980,7 +15669,7 @@
       </p:sp>
       <p:sp>
         <p:nvSpPr>
-          <p:cNvPr id="187" name="Google Shape;187;p16"/>
+          <p:cNvPr id="181" name="Google Shape;181;p16"/>
           <p:cNvSpPr/>
           <p:nvPr/>
         </p:nvSpPr>
@@ -16040,7 +15729,7 @@
       </p:sp>
       <p:sp>
         <p:nvSpPr>
-          <p:cNvPr id="188" name="Google Shape;188;p16"/>
+          <p:cNvPr id="182" name="Google Shape;182;p16"/>
           <p:cNvSpPr txBox="1"/>
           <p:nvPr/>
         </p:nvSpPr>
@@ -16090,7 +15779,7 @@
       </p:sp>
       <p:sp>
         <p:nvSpPr>
-          <p:cNvPr id="189" name="Google Shape;189;p16"/>
+          <p:cNvPr id="183" name="Google Shape;183;p16"/>
           <p:cNvSpPr txBox="1"/>
           <p:nvPr/>
         </p:nvSpPr>
@@ -16140,7 +15829,7 @@
       </p:sp>
       <p:sp>
         <p:nvSpPr>
-          <p:cNvPr id="190" name="Google Shape;190;p16"/>
+          <p:cNvPr id="184" name="Google Shape;184;p16"/>
           <p:cNvSpPr/>
           <p:nvPr/>
         </p:nvSpPr>
@@ -16200,7 +15889,7 @@
       </p:sp>
       <p:sp>
         <p:nvSpPr>
-          <p:cNvPr id="191" name="Google Shape;191;p16"/>
+          <p:cNvPr id="185" name="Google Shape;185;p16"/>
           <p:cNvSpPr txBox="1"/>
           <p:nvPr/>
         </p:nvSpPr>
@@ -16250,7 +15939,7 @@
       </p:sp>
       <p:sp>
         <p:nvSpPr>
-          <p:cNvPr id="192" name="Google Shape;192;p16"/>
+          <p:cNvPr id="186" name="Google Shape;186;p16"/>
           <p:cNvSpPr txBox="1"/>
           <p:nvPr/>
         </p:nvSpPr>
@@ -16300,7 +15989,7 @@
       </p:sp>
       <p:sp>
         <p:nvSpPr>
-          <p:cNvPr id="193" name="Google Shape;193;p16"/>
+          <p:cNvPr id="187" name="Google Shape;187;p16"/>
           <p:cNvSpPr txBox="1"/>
           <p:nvPr/>
         </p:nvSpPr>
@@ -16364,7 +16053,7 @@
     </p:bg>
     <p:spTree>
       <p:nvGrpSpPr>
-        <p:cNvPr id="197" name="Shape 197"/>
+        <p:cNvPr id="191" name="Shape 191"/>
         <p:cNvGrpSpPr/>
         <p:nvPr/>
       </p:nvGrpSpPr>
@@ -16378,7 +16067,7 @@
       </p:grpSpPr>
       <p:sp>
         <p:nvSpPr>
-          <p:cNvPr id="198" name="Google Shape;198;p17"/>
+          <p:cNvPr id="192" name="Google Shape;192;p17"/>
           <p:cNvSpPr/>
           <p:nvPr/>
         </p:nvSpPr>
@@ -16426,7 +16115,7 @@
       </p:sp>
       <p:sp>
         <p:nvSpPr>
-          <p:cNvPr id="199" name="Google Shape;199;p17"/>
+          <p:cNvPr id="193" name="Google Shape;193;p17"/>
           <p:cNvSpPr/>
           <p:nvPr/>
         </p:nvSpPr>
@@ -16482,7 +16171,7 @@
       </p:sp>
       <p:sp>
         <p:nvSpPr>
-          <p:cNvPr id="200" name="Google Shape;200;p17"/>
+          <p:cNvPr id="194" name="Google Shape;194;p17"/>
           <p:cNvSpPr txBox="1"/>
           <p:nvPr/>
         </p:nvSpPr>
@@ -16532,7 +16221,7 @@
       </p:sp>
       <p:sp>
         <p:nvSpPr>
-          <p:cNvPr id="201" name="Google Shape;201;p17"/>
+          <p:cNvPr id="195" name="Google Shape;195;p17"/>
           <p:cNvSpPr txBox="1"/>
           <p:nvPr/>
         </p:nvSpPr>
@@ -16582,7 +16271,7 @@
       </p:sp>
       <p:sp>
         <p:nvSpPr>
-          <p:cNvPr id="202" name="Google Shape;202;p17"/>
+          <p:cNvPr id="196" name="Google Shape;196;p17"/>
           <p:cNvSpPr txBox="1"/>
           <p:nvPr/>
         </p:nvSpPr>
@@ -16632,7 +16321,7 @@
       </p:sp>
       <p:sp>
         <p:nvSpPr>
-          <p:cNvPr id="203" name="Google Shape;203;p17"/>
+          <p:cNvPr id="197" name="Google Shape;197;p17"/>
           <p:cNvSpPr txBox="1"/>
           <p:nvPr/>
         </p:nvSpPr>
@@ -16682,7 +16371,7 @@
       </p:sp>
       <p:sp>
         <p:nvSpPr>
-          <p:cNvPr id="204" name="Google Shape;204;p17"/>
+          <p:cNvPr id="198" name="Google Shape;198;p17"/>
           <p:cNvSpPr txBox="1"/>
           <p:nvPr/>
         </p:nvSpPr>
@@ -16732,7 +16421,7 @@
       </p:sp>
       <p:sp>
         <p:nvSpPr>
-          <p:cNvPr id="205" name="Google Shape;205;p17"/>
+          <p:cNvPr id="199" name="Google Shape;199;p17"/>
           <p:cNvSpPr txBox="1"/>
           <p:nvPr/>
         </p:nvSpPr>
@@ -16782,7 +16471,7 @@
       </p:sp>
       <p:sp>
         <p:nvSpPr>
-          <p:cNvPr id="206" name="Google Shape;206;p17"/>
+          <p:cNvPr id="200" name="Google Shape;200;p17"/>
           <p:cNvSpPr txBox="1"/>
           <p:nvPr/>
         </p:nvSpPr>
@@ -16856,7 +16545,7 @@
       </p:sp>
       <p:sp>
         <p:nvSpPr>
-          <p:cNvPr id="207" name="Google Shape;207;p17"/>
+          <p:cNvPr id="201" name="Google Shape;201;p17"/>
           <p:cNvSpPr txBox="1"/>
           <p:nvPr/>
         </p:nvSpPr>
@@ -16924,7 +16613,7 @@
     </p:bg>
     <p:spTree>
       <p:nvGrpSpPr>
-        <p:cNvPr id="211" name="Shape 211"/>
+        <p:cNvPr id="205" name="Shape 205"/>
         <p:cNvGrpSpPr/>
         <p:nvPr/>
       </p:nvGrpSpPr>
@@ -16938,7 +16627,7 @@
       </p:grpSpPr>
       <p:sp>
         <p:nvSpPr>
-          <p:cNvPr id="212" name="Google Shape;212;p18"/>
+          <p:cNvPr id="206" name="Google Shape;206;p18"/>
           <p:cNvSpPr/>
           <p:nvPr/>
         </p:nvSpPr>
@@ -16996,7 +16685,7 @@
       </p:sp>
       <p:sp>
         <p:nvSpPr>
-          <p:cNvPr id="213" name="Google Shape;213;p18"/>
+          <p:cNvPr id="207" name="Google Shape;207;p18"/>
           <p:cNvSpPr txBox="1"/>
           <p:nvPr/>
         </p:nvSpPr>
@@ -17046,7 +16735,7 @@
       </p:sp>
       <p:sp>
         <p:nvSpPr>
-          <p:cNvPr id="214" name="Google Shape;214;p18"/>
+          <p:cNvPr id="208" name="Google Shape;208;p18"/>
           <p:cNvSpPr txBox="1"/>
           <p:nvPr/>
         </p:nvSpPr>
@@ -17092,7 +16781,7 @@
       </p:sp>
       <p:sp>
         <p:nvSpPr>
-          <p:cNvPr id="215" name="Google Shape;215;p18"/>
+          <p:cNvPr id="209" name="Google Shape;209;p18"/>
           <p:cNvSpPr txBox="1"/>
           <p:nvPr/>
         </p:nvSpPr>
@@ -17142,7 +16831,7 @@
       </p:sp>
       <p:sp>
         <p:nvSpPr>
-          <p:cNvPr id="216" name="Google Shape;216;p18"/>
+          <p:cNvPr id="210" name="Google Shape;210;p18"/>
           <p:cNvSpPr txBox="1"/>
           <p:nvPr/>
         </p:nvSpPr>
@@ -17188,7 +16877,7 @@
       </p:sp>
       <p:sp>
         <p:nvSpPr>
-          <p:cNvPr id="217" name="Google Shape;217;p18"/>
+          <p:cNvPr id="211" name="Google Shape;211;p18"/>
           <p:cNvSpPr txBox="1"/>
           <p:nvPr/>
         </p:nvSpPr>
@@ -17234,7 +16923,7 @@
       </p:sp>
       <p:sp>
         <p:nvSpPr>
-          <p:cNvPr id="218" name="Google Shape;218;p18"/>
+          <p:cNvPr id="212" name="Google Shape;212;p18"/>
           <p:cNvSpPr/>
           <p:nvPr/>
         </p:nvSpPr>
@@ -17300,7 +16989,7 @@
       </p:sp>
       <p:sp>
         <p:nvSpPr>
-          <p:cNvPr id="219" name="Google Shape;219;p18"/>
+          <p:cNvPr id="213" name="Google Shape;213;p18"/>
           <p:cNvSpPr/>
           <p:nvPr/>
         </p:nvSpPr>
@@ -17358,7 +17047,7 @@
       </p:sp>
       <p:sp>
         <p:nvSpPr>
-          <p:cNvPr id="220" name="Google Shape;220;p18"/>
+          <p:cNvPr id="214" name="Google Shape;214;p18"/>
           <p:cNvSpPr txBox="1"/>
           <p:nvPr/>
         </p:nvSpPr>
@@ -17404,7 +17093,7 @@
       </p:sp>
       <p:sp>
         <p:nvSpPr>
-          <p:cNvPr id="221" name="Google Shape;221;p18"/>
+          <p:cNvPr id="215" name="Google Shape;215;p18"/>
           <p:cNvSpPr txBox="1"/>
           <p:nvPr/>
         </p:nvSpPr>
@@ -17469,7 +17158,7 @@
       </p:sp>
       <p:sp>
         <p:nvSpPr>
-          <p:cNvPr id="222" name="Google Shape;222;p18"/>
+          <p:cNvPr id="216" name="Google Shape;216;p18"/>
           <p:cNvSpPr/>
           <p:nvPr/>
         </p:nvSpPr>
@@ -17535,7 +17224,7 @@
       </p:sp>
       <p:sp>
         <p:nvSpPr>
-          <p:cNvPr id="223" name="Google Shape;223;p18"/>
+          <p:cNvPr id="217" name="Google Shape;217;p18"/>
           <p:cNvSpPr/>
           <p:nvPr/>
         </p:nvSpPr>
@@ -17593,7 +17282,7 @@
       </p:sp>
       <p:sp>
         <p:nvSpPr>
-          <p:cNvPr id="224" name="Google Shape;224;p18"/>
+          <p:cNvPr id="218" name="Google Shape;218;p18"/>
           <p:cNvSpPr txBox="1"/>
           <p:nvPr/>
         </p:nvSpPr>
@@ -17639,7 +17328,7 @@
       </p:sp>
       <p:sp>
         <p:nvSpPr>
-          <p:cNvPr id="225" name="Google Shape;225;p18"/>
+          <p:cNvPr id="219" name="Google Shape;219;p18"/>
           <p:cNvSpPr txBox="1"/>
           <p:nvPr/>
         </p:nvSpPr>
@@ -17704,7 +17393,7 @@
       </p:sp>
       <p:sp>
         <p:nvSpPr>
-          <p:cNvPr id="226" name="Google Shape;226;p18"/>
+          <p:cNvPr id="220" name="Google Shape;220;p18"/>
           <p:cNvSpPr/>
           <p:nvPr/>
         </p:nvSpPr>
@@ -17770,7 +17459,7 @@
       </p:sp>
       <p:sp>
         <p:nvSpPr>
-          <p:cNvPr id="227" name="Google Shape;227;p18"/>
+          <p:cNvPr id="221" name="Google Shape;221;p18"/>
           <p:cNvSpPr/>
           <p:nvPr/>
         </p:nvSpPr>
@@ -17828,7 +17517,7 @@
       </p:sp>
       <p:sp>
         <p:nvSpPr>
-          <p:cNvPr id="228" name="Google Shape;228;p18"/>
+          <p:cNvPr id="222" name="Google Shape;222;p18"/>
           <p:cNvSpPr txBox="1"/>
           <p:nvPr/>
         </p:nvSpPr>
@@ -17874,7 +17563,7 @@
       </p:sp>
       <p:sp>
         <p:nvSpPr>
-          <p:cNvPr id="229" name="Google Shape;229;p18"/>
+          <p:cNvPr id="223" name="Google Shape;223;p18"/>
           <p:cNvSpPr txBox="1"/>
           <p:nvPr/>
         </p:nvSpPr>
@@ -17939,7 +17628,7 @@
       </p:sp>
       <p:cxnSp>
         <p:nvCxnSpPr>
-          <p:cNvPr id="230" name="Google Shape;230;p18"/>
+          <p:cNvPr id="224" name="Google Shape;224;p18"/>
           <p:cNvCxnSpPr/>
           <p:nvPr/>
         </p:nvCxnSpPr>
@@ -17972,7 +17661,7 @@
       </p:cxnSp>
       <p:cxnSp>
         <p:nvCxnSpPr>
-          <p:cNvPr id="231" name="Google Shape;231;p18"/>
+          <p:cNvPr id="225" name="Google Shape;225;p18"/>
           <p:cNvCxnSpPr/>
           <p:nvPr/>
         </p:nvCxnSpPr>
@@ -18005,7 +17694,7 @@
       </p:cxnSp>
       <p:sp>
         <p:nvSpPr>
-          <p:cNvPr id="232" name="Google Shape;232;p18"/>
+          <p:cNvPr id="226" name="Google Shape;226;p18"/>
           <p:cNvSpPr txBox="1"/>
           <p:nvPr/>
         </p:nvSpPr>
@@ -18051,7 +17740,7 @@
       </p:sp>
       <p:sp>
         <p:nvSpPr>
-          <p:cNvPr id="233" name="Google Shape;233;p18"/>
+          <p:cNvPr id="227" name="Google Shape;227;p18"/>
           <p:cNvSpPr/>
           <p:nvPr/>
         </p:nvSpPr>
@@ -18111,7 +17800,7 @@
       </p:sp>
       <p:sp>
         <p:nvSpPr>
-          <p:cNvPr id="234" name="Google Shape;234;p18"/>
+          <p:cNvPr id="228" name="Google Shape;228;p18"/>
           <p:cNvSpPr txBox="1"/>
           <p:nvPr/>
         </p:nvSpPr>
@@ -18157,7 +17846,7 @@
       </p:sp>
       <p:sp>
         <p:nvSpPr>
-          <p:cNvPr id="235" name="Google Shape;235;p18"/>
+          <p:cNvPr id="229" name="Google Shape;229;p18"/>
           <p:cNvSpPr txBox="1"/>
           <p:nvPr/>
         </p:nvSpPr>
@@ -18203,7 +17892,7 @@
       </p:sp>
       <p:sp>
         <p:nvSpPr>
-          <p:cNvPr id="236" name="Google Shape;236;p18"/>
+          <p:cNvPr id="230" name="Google Shape;230;p18"/>
           <p:cNvSpPr/>
           <p:nvPr/>
         </p:nvSpPr>
@@ -18263,7 +17952,7 @@
       </p:sp>
       <p:sp>
         <p:nvSpPr>
-          <p:cNvPr id="237" name="Google Shape;237;p18"/>
+          <p:cNvPr id="231" name="Google Shape;231;p18"/>
           <p:cNvSpPr txBox="1"/>
           <p:nvPr/>
         </p:nvSpPr>
@@ -18309,7 +17998,7 @@
       </p:sp>
       <p:sp>
         <p:nvSpPr>
-          <p:cNvPr id="238" name="Google Shape;238;p18"/>
+          <p:cNvPr id="232" name="Google Shape;232;p18"/>
           <p:cNvSpPr txBox="1"/>
           <p:nvPr/>
         </p:nvSpPr>
@@ -18355,7 +18044,7 @@
       </p:sp>
       <p:sp>
         <p:nvSpPr>
-          <p:cNvPr id="239" name="Google Shape;239;p18"/>
+          <p:cNvPr id="233" name="Google Shape;233;p18"/>
           <p:cNvSpPr/>
           <p:nvPr/>
         </p:nvSpPr>
@@ -18415,7 +18104,7 @@
       </p:sp>
       <p:sp>
         <p:nvSpPr>
-          <p:cNvPr id="240" name="Google Shape;240;p18"/>
+          <p:cNvPr id="234" name="Google Shape;234;p18"/>
           <p:cNvSpPr txBox="1"/>
           <p:nvPr/>
         </p:nvSpPr>
@@ -18461,7 +18150,7 @@
       </p:sp>
       <p:sp>
         <p:nvSpPr>
-          <p:cNvPr id="241" name="Google Shape;241;p18"/>
+          <p:cNvPr id="235" name="Google Shape;235;p18"/>
           <p:cNvSpPr txBox="1"/>
           <p:nvPr/>
         </p:nvSpPr>
@@ -18507,7 +18196,7 @@
       </p:sp>
       <p:sp>
         <p:nvSpPr>
-          <p:cNvPr id="242" name="Google Shape;242;p18"/>
+          <p:cNvPr id="236" name="Google Shape;236;p18"/>
           <p:cNvSpPr/>
           <p:nvPr/>
         </p:nvSpPr>
@@ -18567,7 +18256,7 @@
       </p:sp>
       <p:sp>
         <p:nvSpPr>
-          <p:cNvPr id="243" name="Google Shape;243;p18"/>
+          <p:cNvPr id="237" name="Google Shape;237;p18"/>
           <p:cNvSpPr txBox="1"/>
           <p:nvPr/>
         </p:nvSpPr>
@@ -18613,7 +18302,7 @@
       </p:sp>
       <p:sp>
         <p:nvSpPr>
-          <p:cNvPr id="244" name="Google Shape;244;p18"/>
+          <p:cNvPr id="238" name="Google Shape;238;p18"/>
           <p:cNvSpPr txBox="1"/>
           <p:nvPr/>
         </p:nvSpPr>
@@ -18659,7 +18348,7 @@
       </p:sp>
       <p:sp>
         <p:nvSpPr>
-          <p:cNvPr id="245" name="Google Shape;245;p18"/>
+          <p:cNvPr id="239" name="Google Shape;239;p18"/>
           <p:cNvSpPr txBox="1"/>
           <p:nvPr/>
         </p:nvSpPr>
@@ -18723,7 +18412,7 @@
     </p:bg>
     <p:spTree>
       <p:nvGrpSpPr>
-        <p:cNvPr id="249" name="Shape 249"/>
+        <p:cNvPr id="243" name="Shape 243"/>
         <p:cNvGrpSpPr/>
         <p:nvPr/>
       </p:nvGrpSpPr>
@@ -18737,7 +18426,7 @@
       </p:grpSpPr>
       <p:sp>
         <p:nvSpPr>
-          <p:cNvPr id="250" name="Google Shape;250;p19"/>
+          <p:cNvPr id="244" name="Google Shape;244;p19"/>
           <p:cNvSpPr/>
           <p:nvPr/>
         </p:nvSpPr>
@@ -18795,7 +18484,7 @@
       </p:sp>
       <p:sp>
         <p:nvSpPr>
-          <p:cNvPr id="251" name="Google Shape;251;p19"/>
+          <p:cNvPr id="245" name="Google Shape;245;p19"/>
           <p:cNvSpPr txBox="1"/>
           <p:nvPr/>
         </p:nvSpPr>
@@ -18841,7 +18530,7 @@
       </p:sp>
       <p:sp>
         <p:nvSpPr>
-          <p:cNvPr id="252" name="Google Shape;252;p19"/>
+          <p:cNvPr id="246" name="Google Shape;246;p19"/>
           <p:cNvSpPr txBox="1"/>
           <p:nvPr/>
         </p:nvSpPr>
@@ -18887,7 +18576,7 @@
       </p:sp>
       <p:sp>
         <p:nvSpPr>
-          <p:cNvPr id="253" name="Google Shape;253;p19"/>
+          <p:cNvPr id="247" name="Google Shape;247;p19"/>
           <p:cNvSpPr txBox="1"/>
           <p:nvPr/>
         </p:nvSpPr>
@@ -18937,7 +18626,7 @@
       </p:sp>
       <p:sp>
         <p:nvSpPr>
-          <p:cNvPr id="254" name="Google Shape;254;p19"/>
+          <p:cNvPr id="248" name="Google Shape;248;p19"/>
           <p:cNvSpPr txBox="1"/>
           <p:nvPr/>
         </p:nvSpPr>
@@ -18983,7 +18672,7 @@
       </p:sp>
       <p:sp>
         <p:nvSpPr>
-          <p:cNvPr id="255" name="Google Shape;255;p19"/>
+          <p:cNvPr id="249" name="Google Shape;249;p19"/>
           <p:cNvSpPr/>
           <p:nvPr/>
         </p:nvSpPr>
@@ -19043,7 +18732,7 @@
       </p:sp>
       <p:sp>
         <p:nvSpPr>
-          <p:cNvPr id="256" name="Google Shape;256;p19"/>
+          <p:cNvPr id="250" name="Google Shape;250;p19"/>
           <p:cNvSpPr/>
           <p:nvPr/>
         </p:nvSpPr>
@@ -19103,7 +18792,7 @@
       </p:sp>
       <p:sp>
         <p:nvSpPr>
-          <p:cNvPr id="257" name="Google Shape;257;p19"/>
+          <p:cNvPr id="251" name="Google Shape;251;p19"/>
           <p:cNvSpPr txBox="1"/>
           <p:nvPr/>
         </p:nvSpPr>
@@ -19149,7 +18838,7 @@
       </p:sp>
       <p:sp>
         <p:nvSpPr>
-          <p:cNvPr id="258" name="Google Shape;258;p19"/>
+          <p:cNvPr id="252" name="Google Shape;252;p19"/>
           <p:cNvSpPr txBox="1"/>
           <p:nvPr/>
         </p:nvSpPr>
@@ -19195,7 +18884,7 @@
       </p:sp>
       <p:sp>
         <p:nvSpPr>
-          <p:cNvPr id="259" name="Google Shape;259;p19"/>
+          <p:cNvPr id="253" name="Google Shape;253;p19"/>
           <p:cNvSpPr txBox="1"/>
           <p:nvPr/>
         </p:nvSpPr>
@@ -19241,7 +18930,7 @@
       </p:sp>
       <p:sp>
         <p:nvSpPr>
-          <p:cNvPr id="260" name="Google Shape;260;p19"/>
+          <p:cNvPr id="254" name="Google Shape;254;p19"/>
           <p:cNvSpPr/>
           <p:nvPr/>
         </p:nvSpPr>
@@ -19307,7 +18996,7 @@
       </p:sp>
       <p:sp>
         <p:nvSpPr>
-          <p:cNvPr id="261" name="Google Shape;261;p19"/>
+          <p:cNvPr id="255" name="Google Shape;255;p19"/>
           <p:cNvSpPr/>
           <p:nvPr/>
         </p:nvSpPr>
@@ -19365,7 +19054,7 @@
       </p:sp>
       <p:sp>
         <p:nvSpPr>
-          <p:cNvPr id="262" name="Google Shape;262;p19"/>
+          <p:cNvPr id="256" name="Google Shape;256;p19"/>
           <p:cNvSpPr txBox="1"/>
           <p:nvPr/>
         </p:nvSpPr>
@@ -19411,7 +19100,7 @@
       </p:sp>
       <p:sp>
         <p:nvSpPr>
-          <p:cNvPr id="263" name="Google Shape;263;p19"/>
+          <p:cNvPr id="257" name="Google Shape;257;p19"/>
           <p:cNvSpPr txBox="1"/>
           <p:nvPr/>
         </p:nvSpPr>
@@ -19457,7 +19146,7 @@
       </p:sp>
       <p:sp>
         <p:nvSpPr>
-          <p:cNvPr id="264" name="Google Shape;264;p19"/>
+          <p:cNvPr id="258" name="Google Shape;258;p19"/>
           <p:cNvSpPr txBox="1"/>
           <p:nvPr/>
         </p:nvSpPr>
@@ -19503,7 +19192,7 @@
       </p:sp>
       <p:sp>
         <p:nvSpPr>
-          <p:cNvPr id="265" name="Google Shape;265;p19"/>
+          <p:cNvPr id="259" name="Google Shape;259;p19"/>
           <p:cNvSpPr/>
           <p:nvPr/>
         </p:nvSpPr>
@@ -19569,7 +19258,7 @@
       </p:sp>
       <p:sp>
         <p:nvSpPr>
-          <p:cNvPr id="266" name="Google Shape;266;p19"/>
+          <p:cNvPr id="260" name="Google Shape;260;p19"/>
           <p:cNvSpPr/>
           <p:nvPr/>
         </p:nvSpPr>
@@ -19627,7 +19316,7 @@
       </p:sp>
       <p:sp>
         <p:nvSpPr>
-          <p:cNvPr id="267" name="Google Shape;267;p19"/>
+          <p:cNvPr id="261" name="Google Shape;261;p19"/>
           <p:cNvSpPr txBox="1"/>
           <p:nvPr/>
         </p:nvSpPr>
@@ -19673,7 +19362,7 @@
       </p:sp>
       <p:sp>
         <p:nvSpPr>
-          <p:cNvPr id="268" name="Google Shape;268;p19"/>
+          <p:cNvPr id="262" name="Google Shape;262;p19"/>
           <p:cNvSpPr txBox="1"/>
           <p:nvPr/>
         </p:nvSpPr>
@@ -19719,7 +19408,7 @@
       </p:sp>
       <p:sp>
         <p:nvSpPr>
-          <p:cNvPr id="269" name="Google Shape;269;p19"/>
+          <p:cNvPr id="263" name="Google Shape;263;p19"/>
           <p:cNvSpPr txBox="1"/>
           <p:nvPr/>
         </p:nvSpPr>
@@ -19765,7 +19454,7 @@
       </p:sp>
       <p:sp>
         <p:nvSpPr>
-          <p:cNvPr id="270" name="Google Shape;270;p19"/>
+          <p:cNvPr id="264" name="Google Shape;264;p19"/>
           <p:cNvSpPr/>
           <p:nvPr/>
         </p:nvSpPr>
@@ -19831,7 +19520,7 @@
       </p:sp>
       <p:sp>
         <p:nvSpPr>
-          <p:cNvPr id="271" name="Google Shape;271;p19"/>
+          <p:cNvPr id="265" name="Google Shape;265;p19"/>
           <p:cNvSpPr/>
           <p:nvPr/>
         </p:nvSpPr>
@@ -19889,7 +19578,7 @@
       </p:sp>
       <p:sp>
         <p:nvSpPr>
-          <p:cNvPr id="272" name="Google Shape;272;p19"/>
+          <p:cNvPr id="266" name="Google Shape;266;p19"/>
           <p:cNvSpPr txBox="1"/>
           <p:nvPr/>
         </p:nvSpPr>
@@ -19935,7 +19624,7 @@
       </p:sp>
       <p:sp>
         <p:nvSpPr>
-          <p:cNvPr id="273" name="Google Shape;273;p19"/>
+          <p:cNvPr id="267" name="Google Shape;267;p19"/>
           <p:cNvSpPr txBox="1"/>
           <p:nvPr/>
         </p:nvSpPr>
@@ -19981,7 +19670,7 @@
       </p:sp>
       <p:sp>
         <p:nvSpPr>
-          <p:cNvPr id="274" name="Google Shape;274;p19"/>
+          <p:cNvPr id="268" name="Google Shape;268;p19"/>
           <p:cNvSpPr txBox="1"/>
           <p:nvPr/>
         </p:nvSpPr>
@@ -20027,7 +19716,7 @@
       </p:sp>
       <p:sp>
         <p:nvSpPr>
-          <p:cNvPr id="275" name="Google Shape;275;p19"/>
+          <p:cNvPr id="269" name="Google Shape;269;p19"/>
           <p:cNvSpPr/>
           <p:nvPr/>
         </p:nvSpPr>
@@ -20093,7 +19782,7 @@
       </p:sp>
       <p:sp>
         <p:nvSpPr>
-          <p:cNvPr id="276" name="Google Shape;276;p19"/>
+          <p:cNvPr id="270" name="Google Shape;270;p19"/>
           <p:cNvSpPr/>
           <p:nvPr/>
         </p:nvSpPr>
@@ -20151,7 +19840,7 @@
       </p:sp>
       <p:sp>
         <p:nvSpPr>
-          <p:cNvPr id="277" name="Google Shape;277;p19"/>
+          <p:cNvPr id="271" name="Google Shape;271;p19"/>
           <p:cNvSpPr txBox="1"/>
           <p:nvPr/>
         </p:nvSpPr>
@@ -20197,7 +19886,7 @@
       </p:sp>
       <p:sp>
         <p:nvSpPr>
-          <p:cNvPr id="278" name="Google Shape;278;p19"/>
+          <p:cNvPr id="272" name="Google Shape;272;p19"/>
           <p:cNvSpPr txBox="1"/>
           <p:nvPr/>
         </p:nvSpPr>
@@ -20243,7 +19932,7 @@
       </p:sp>
       <p:sp>
         <p:nvSpPr>
-          <p:cNvPr id="279" name="Google Shape;279;p19"/>
+          <p:cNvPr id="273" name="Google Shape;273;p19"/>
           <p:cNvSpPr txBox="1"/>
           <p:nvPr/>
         </p:nvSpPr>
@@ -20289,7 +19978,7 @@
       </p:sp>
       <p:sp>
         <p:nvSpPr>
-          <p:cNvPr id="280" name="Google Shape;280;p19"/>
+          <p:cNvPr id="274" name="Google Shape;274;p19"/>
           <p:cNvSpPr txBox="1"/>
           <p:nvPr/>
         </p:nvSpPr>
@@ -20335,7 +20024,7 @@
       </p:sp>
       <p:sp>
         <p:nvSpPr>
-          <p:cNvPr id="281" name="Google Shape;281;p19"/>
+          <p:cNvPr id="275" name="Google Shape;275;p19"/>
           <p:cNvSpPr txBox="1"/>
           <p:nvPr/>
         </p:nvSpPr>
@@ -20376,6 +20065,1805 @@
               <a:t>Trace each label from ExtXYZ through the loss, checkpoint and ASE inference.</a:t>
             </a:r>
             <a:endParaRPr/>
+          </a:p>
+        </p:txBody>
+      </p:sp>
+    </p:spTree>
+  </p:cSld>
+  <p:clrMapOvr>
+    <a:masterClrMapping/>
+  </p:clrMapOvr>
+</p:sld>
+</file>
+
+<file path=ppt/slides/slide8.xml><?xml version="1.0" encoding="utf-8"?>
+<p:sld xmlns:a="http://schemas.openxmlformats.org/drawingml/2006/main" xmlns:r="http://schemas.openxmlformats.org/officeDocument/2006/relationships" xmlns:mc="http://schemas.openxmlformats.org/markup-compatibility/2006" xmlns:mv="urn:schemas-microsoft-com:mac:vml" xmlns:p="http://schemas.openxmlformats.org/presentationml/2006/main" xmlns:c="http://schemas.openxmlformats.org/drawingml/2006/chart" xmlns:dgm="http://schemas.openxmlformats.org/drawingml/2006/diagram" xmlns:o="urn:schemas-microsoft-com:office:office" xmlns:v="urn:schemas-microsoft-com:vml" xmlns:pvml="urn:schemas-microsoft-com:office:powerpoint" xmlns:com="http://schemas.openxmlformats.org/drawingml/2006/compatibility" xmlns:p14="http://schemas.microsoft.com/office/powerpoint/2010/main" xmlns:p15="http://schemas.microsoft.com/office/powerpoint/2012/main" xmlns:ahyp="http://schemas.microsoft.com/office/drawing/2018/hyperlinkcolor">
+  <p:cSld>
+    <p:bg>
+      <p:bgPr>
+        <a:solidFill>
+          <a:srgbClr val="F7F9FB"/>
+        </a:solidFill>
+      </p:bgPr>
+    </p:bg>
+    <p:spTree>
+      <p:nvGrpSpPr>
+        <p:cNvPr id="279" name="Shape 279"/>
+        <p:cNvGrpSpPr/>
+        <p:nvPr/>
+      </p:nvGrpSpPr>
+      <p:grpSpPr>
+        <a:xfrm>
+          <a:off x="0" y="0"/>
+          <a:ext cx="0" cy="0"/>
+          <a:chOff x="0" y="0"/>
+          <a:chExt cx="0" cy="0"/>
+        </a:xfrm>
+      </p:grpSpPr>
+      <p:sp>
+        <p:nvSpPr>
+          <p:cNvPr id="280" name="Google Shape;280;p20"/>
+          <p:cNvSpPr/>
+          <p:nvPr/>
+        </p:nvSpPr>
+        <p:spPr>
+          <a:xfrm>
+            <a:off x="0" y="0"/>
+            <a:ext cx="12191700" cy="118800"/>
+          </a:xfrm>
+          <a:prstGeom prst="rect">
+            <a:avLst/>
+          </a:prstGeom>
+          <a:solidFill>
+            <a:srgbClr val="183148"/>
+          </a:solidFill>
+          <a:ln>
+            <a:noFill/>
+          </a:ln>
+          <a:effectLst>
+            <a:outerShdw blurRad="40000" rotWithShape="0" dir="5400000" dist="23000">
+              <a:srgbClr val="000000">
+                <a:alpha val="34900"/>
+              </a:srgbClr>
+            </a:outerShdw>
+          </a:effectLst>
+        </p:spPr>
+        <p:txBody>
+          <a:bodyPr anchorCtr="0" anchor="ctr" bIns="45700" lIns="91425" spcFirstLastPara="1" rIns="91425" wrap="square" tIns="45700">
+            <a:noAutofit/>
+          </a:bodyPr>
+          <a:lstStyle/>
+          <a:p>
+            <a:pPr indent="0" lvl="0" marL="0" marR="0" rtl="0" algn="ctr">
+              <a:spcBef>
+                <a:spcPts val="0"/>
+              </a:spcBef>
+              <a:spcAft>
+                <a:spcPts val="0"/>
+              </a:spcAft>
+              <a:buNone/>
+            </a:pPr>
+            <a:r>
+              <a:t/>
+            </a:r>
+            <a:endParaRPr b="0" i="0" sz="1800" u="none" cap="none" strike="noStrike">
+              <a:solidFill>
+                <a:schemeClr val="dk1"/>
+              </a:solidFill>
+              <a:latin typeface="Calibri"/>
+              <a:ea typeface="Calibri"/>
+              <a:cs typeface="Calibri"/>
+              <a:sym typeface="Calibri"/>
+            </a:endParaRPr>
+          </a:p>
+        </p:txBody>
+      </p:sp>
+      <p:sp>
+        <p:nvSpPr>
+          <p:cNvPr id="281" name="Google Shape;281;p20"/>
+          <p:cNvSpPr txBox="1"/>
+          <p:nvPr/>
+        </p:nvSpPr>
+        <p:spPr>
+          <a:xfrm>
+            <a:off x="566928" y="347472"/>
+            <a:ext cx="10972800" cy="219600"/>
+          </a:xfrm>
+          <a:prstGeom prst="rect">
+            <a:avLst/>
+          </a:prstGeom>
+          <a:noFill/>
+          <a:ln>
+            <a:noFill/>
+          </a:ln>
+        </p:spPr>
+        <p:txBody>
+          <a:bodyPr anchorCtr="0" anchor="ctr" bIns="18275" lIns="18275" spcFirstLastPara="1" rIns="18275" wrap="square" tIns="18275">
+            <a:noAutofit/>
+          </a:bodyPr>
+          <a:lstStyle/>
+          <a:p>
+            <a:pPr indent="0" lvl="0" marL="0" marR="0" rtl="0" algn="l">
+              <a:spcBef>
+                <a:spcPts val="0"/>
+              </a:spcBef>
+              <a:spcAft>
+                <a:spcPts val="0"/>
+              </a:spcAft>
+              <a:buNone/>
+            </a:pPr>
+            <a:r>
+              <a:rPr b="1" lang="en-US" sz="1000">
+                <a:solidFill>
+                  <a:srgbClr val="25848B"/>
+                </a:solidFill>
+              </a:rPr>
+              <a:t>MACEFIELD CODEBASE · SOURCE TREE</a:t>
+            </a:r>
+            <a:endParaRPr/>
+          </a:p>
+        </p:txBody>
+      </p:sp>
+      <p:sp>
+        <p:nvSpPr>
+          <p:cNvPr id="282" name="Google Shape;282;p20"/>
+          <p:cNvSpPr txBox="1"/>
+          <p:nvPr/>
+        </p:nvSpPr>
+        <p:spPr>
+          <a:xfrm>
+            <a:off x="566928" y="658368"/>
+            <a:ext cx="10972800" cy="567000"/>
+          </a:xfrm>
+          <a:prstGeom prst="rect">
+            <a:avLst/>
+          </a:prstGeom>
+          <a:noFill/>
+          <a:ln>
+            <a:noFill/>
+          </a:ln>
+        </p:spPr>
+        <p:txBody>
+          <a:bodyPr anchorCtr="0" anchor="ctr" bIns="18275" lIns="18275" spcFirstLastPara="1" rIns="18275" wrap="square" tIns="18275">
+            <a:noAutofit/>
+          </a:bodyPr>
+          <a:lstStyle/>
+          <a:p>
+            <a:pPr indent="0" lvl="0" marL="0" marR="0" rtl="0" algn="l">
+              <a:spcBef>
+                <a:spcPts val="0"/>
+              </a:spcBef>
+              <a:spcAft>
+                <a:spcPts val="0"/>
+              </a:spcAft>
+              <a:buNone/>
+            </a:pPr>
+            <a:r>
+              <a:rPr b="1" lang="en-US" sz="3000">
+                <a:solidFill>
+                  <a:srgbClr val="183148"/>
+                </a:solidFill>
+              </a:rPr>
+              <a:t>MACEField in the MACE source tree</a:t>
+            </a:r>
+            <a:endParaRPr/>
+          </a:p>
+        </p:txBody>
+      </p:sp>
+      <p:sp>
+        <p:nvSpPr>
+          <p:cNvPr id="283" name="Google Shape;283;p20"/>
+          <p:cNvSpPr txBox="1"/>
+          <p:nvPr/>
+        </p:nvSpPr>
+        <p:spPr>
+          <a:xfrm>
+            <a:off x="502920" y="6547104"/>
+            <a:ext cx="9144000" cy="164700"/>
+          </a:xfrm>
+          <a:prstGeom prst="rect">
+            <a:avLst/>
+          </a:prstGeom>
+          <a:noFill/>
+          <a:ln>
+            <a:noFill/>
+          </a:ln>
+        </p:spPr>
+        <p:txBody>
+          <a:bodyPr anchorCtr="0" anchor="ctr" bIns="18275" lIns="18275" spcFirstLastPara="1" rIns="18275" wrap="square" tIns="18275">
+            <a:noAutofit/>
+          </a:bodyPr>
+          <a:lstStyle/>
+          <a:p>
+            <a:pPr indent="0" lvl="0" marL="0" marR="0" rtl="0" algn="l">
+              <a:spcBef>
+                <a:spcPts val="0"/>
+              </a:spcBef>
+              <a:spcAft>
+                <a:spcPts val="0"/>
+              </a:spcAft>
+              <a:buNone/>
+            </a:pPr>
+            <a:r>
+              <a:rPr b="1" i="0" lang="en-US" sz="900" u="none" cap="none" strike="noStrike">
+                <a:solidFill>
+                  <a:srgbClr val="536676"/>
+                </a:solidFill>
+                <a:latin typeface="Arial"/>
+                <a:ea typeface="Arial"/>
+                <a:cs typeface="Arial"/>
+                <a:sym typeface="Arial"/>
+              </a:rPr>
+              <a:t>LJC–TYC SUMMER SCHOOL  ·  ATOMIC-SCALE MODELLING</a:t>
+            </a:r>
+            <a:endParaRPr/>
+          </a:p>
+        </p:txBody>
+      </p:sp>
+      <p:sp>
+        <p:nvSpPr>
+          <p:cNvPr id="284" name="Google Shape;284;p20"/>
+          <p:cNvSpPr txBox="1"/>
+          <p:nvPr/>
+        </p:nvSpPr>
+        <p:spPr>
+          <a:xfrm>
+            <a:off x="11292840" y="6510528"/>
+            <a:ext cx="365700" cy="210300"/>
+          </a:xfrm>
+          <a:prstGeom prst="rect">
+            <a:avLst/>
+          </a:prstGeom>
+          <a:noFill/>
+          <a:ln>
+            <a:noFill/>
+          </a:ln>
+        </p:spPr>
+        <p:txBody>
+          <a:bodyPr anchorCtr="0" anchor="ctr" bIns="18275" lIns="18275" spcFirstLastPara="1" rIns="18275" wrap="square" tIns="18275">
+            <a:noAutofit/>
+          </a:bodyPr>
+          <a:lstStyle/>
+          <a:p>
+            <a:pPr indent="0" lvl="0" marL="0" marR="0" rtl="0" algn="r">
+              <a:spcBef>
+                <a:spcPts val="0"/>
+              </a:spcBef>
+              <a:spcAft>
+                <a:spcPts val="0"/>
+              </a:spcAft>
+              <a:buNone/>
+            </a:pPr>
+            <a:r>
+              <a:rPr b="1" lang="en-US" sz="1000">
+                <a:solidFill>
+                  <a:srgbClr val="536676"/>
+                </a:solidFill>
+              </a:rPr>
+              <a:t>08</a:t>
+            </a:r>
+            <a:endParaRPr b="1" sz="1000">
+              <a:solidFill>
+                <a:srgbClr val="536676"/>
+              </a:solidFill>
+            </a:endParaRPr>
+          </a:p>
+        </p:txBody>
+      </p:sp>
+      <p:sp>
+        <p:nvSpPr>
+          <p:cNvPr id="285" name="Google Shape;285;p20"/>
+          <p:cNvSpPr/>
+          <p:nvPr/>
+        </p:nvSpPr>
+        <p:spPr>
+          <a:xfrm>
+            <a:off x="621792" y="1481328"/>
+            <a:ext cx="10945500" cy="804600"/>
+          </a:xfrm>
+          <a:prstGeom prst="roundRect">
+            <a:avLst>
+              <a:gd fmla="val 8000" name="adj"/>
+            </a:avLst>
+          </a:prstGeom>
+          <a:solidFill>
+            <a:srgbClr val="183148"/>
+          </a:solidFill>
+          <a:ln>
+            <a:noFill/>
+          </a:ln>
+          <a:effectLst>
+            <a:outerShdw blurRad="40000" rotWithShape="0" dir="5400000" dist="23000">
+              <a:srgbClr val="000000">
+                <a:alpha val="34900"/>
+              </a:srgbClr>
+            </a:outerShdw>
+          </a:effectLst>
+        </p:spPr>
+        <p:txBody>
+          <a:bodyPr anchorCtr="0" anchor="ctr" bIns="45700" lIns="91425" spcFirstLastPara="1" rIns="91425" wrap="square" tIns="45700">
+            <a:noAutofit/>
+          </a:bodyPr>
+          <a:lstStyle/>
+          <a:p>
+            <a:pPr indent="0" lvl="0" marL="0" marR="0" rtl="0" algn="ctr">
+              <a:spcBef>
+                <a:spcPts val="0"/>
+              </a:spcBef>
+              <a:spcAft>
+                <a:spcPts val="0"/>
+              </a:spcAft>
+              <a:buNone/>
+            </a:pPr>
+            <a:r>
+              <a:t/>
+            </a:r>
+            <a:endParaRPr b="0" i="0" sz="1800" u="none" cap="none" strike="noStrike">
+              <a:solidFill>
+                <a:schemeClr val="dk1"/>
+              </a:solidFill>
+              <a:latin typeface="Calibri"/>
+              <a:ea typeface="Calibri"/>
+              <a:cs typeface="Calibri"/>
+              <a:sym typeface="Calibri"/>
+            </a:endParaRPr>
+          </a:p>
+        </p:txBody>
+      </p:sp>
+      <p:sp>
+        <p:nvSpPr>
+          <p:cNvPr id="286" name="Google Shape;286;p20"/>
+          <p:cNvSpPr/>
+          <p:nvPr/>
+        </p:nvSpPr>
+        <p:spPr>
+          <a:xfrm>
+            <a:off x="841248" y="1664208"/>
+            <a:ext cx="640200" cy="420600"/>
+          </a:xfrm>
+          <a:prstGeom prst="roundRect">
+            <a:avLst>
+              <a:gd fmla="val 8000" name="adj"/>
+            </a:avLst>
+          </a:prstGeom>
+          <a:solidFill>
+            <a:srgbClr val="25848B"/>
+          </a:solidFill>
+          <a:ln>
+            <a:noFill/>
+          </a:ln>
+          <a:effectLst>
+            <a:outerShdw blurRad="40000" rotWithShape="0" dir="5400000" dist="23000">
+              <a:srgbClr val="000000">
+                <a:alpha val="34900"/>
+              </a:srgbClr>
+            </a:outerShdw>
+          </a:effectLst>
+        </p:spPr>
+        <p:txBody>
+          <a:bodyPr anchorCtr="0" anchor="ctr" bIns="45700" lIns="91425" spcFirstLastPara="1" rIns="91425" wrap="square" tIns="45700">
+            <a:noAutofit/>
+          </a:bodyPr>
+          <a:lstStyle/>
+          <a:p>
+            <a:pPr indent="0" lvl="0" marL="0" marR="0" rtl="0" algn="ctr">
+              <a:spcBef>
+                <a:spcPts val="0"/>
+              </a:spcBef>
+              <a:spcAft>
+                <a:spcPts val="0"/>
+              </a:spcAft>
+              <a:buNone/>
+            </a:pPr>
+            <a:r>
+              <a:t/>
+            </a:r>
+            <a:endParaRPr b="0" i="0" sz="1800" u="none" cap="none" strike="noStrike">
+              <a:solidFill>
+                <a:schemeClr val="dk1"/>
+              </a:solidFill>
+              <a:latin typeface="Calibri"/>
+              <a:ea typeface="Calibri"/>
+              <a:cs typeface="Calibri"/>
+              <a:sym typeface="Calibri"/>
+            </a:endParaRPr>
+          </a:p>
+        </p:txBody>
+      </p:sp>
+      <p:sp>
+        <p:nvSpPr>
+          <p:cNvPr id="287" name="Google Shape;287;p20"/>
+          <p:cNvSpPr txBox="1"/>
+          <p:nvPr/>
+        </p:nvSpPr>
+        <p:spPr>
+          <a:xfrm>
+            <a:off x="841248" y="1682496"/>
+            <a:ext cx="640200" cy="365700"/>
+          </a:xfrm>
+          <a:prstGeom prst="rect">
+            <a:avLst/>
+          </a:prstGeom>
+          <a:noFill/>
+          <a:ln>
+            <a:noFill/>
+          </a:ln>
+        </p:spPr>
+        <p:txBody>
+          <a:bodyPr anchorCtr="0" anchor="ctr" bIns="18275" lIns="18275" spcFirstLastPara="1" rIns="18275" wrap="square" tIns="18275">
+            <a:noAutofit/>
+          </a:bodyPr>
+          <a:lstStyle/>
+          <a:p>
+            <a:pPr indent="0" lvl="0" marL="0" marR="0" rtl="0" algn="ctr">
+              <a:spcBef>
+                <a:spcPts val="0"/>
+              </a:spcBef>
+              <a:spcAft>
+                <a:spcPts val="0"/>
+              </a:spcAft>
+              <a:buNone/>
+            </a:pPr>
+            <a:r>
+              <a:rPr b="1" lang="en-US">
+                <a:solidFill>
+                  <a:srgbClr val="FFFFFF"/>
+                </a:solidFill>
+              </a:rPr>
+              <a:t>MACE</a:t>
+            </a:r>
+            <a:endParaRPr/>
+          </a:p>
+        </p:txBody>
+      </p:sp>
+      <p:sp>
+        <p:nvSpPr>
+          <p:cNvPr id="288" name="Google Shape;288;p20"/>
+          <p:cNvSpPr txBox="1"/>
+          <p:nvPr/>
+        </p:nvSpPr>
+        <p:spPr>
+          <a:xfrm>
+            <a:off x="1719072" y="1572768"/>
+            <a:ext cx="2926200" cy="274200"/>
+          </a:xfrm>
+          <a:prstGeom prst="rect">
+            <a:avLst/>
+          </a:prstGeom>
+          <a:noFill/>
+          <a:ln>
+            <a:noFill/>
+          </a:ln>
+        </p:spPr>
+        <p:txBody>
+          <a:bodyPr anchorCtr="0" anchor="ctr" bIns="18275" lIns="18275" spcFirstLastPara="1" rIns="18275" wrap="square" tIns="18275">
+            <a:noAutofit/>
+          </a:bodyPr>
+          <a:lstStyle/>
+          <a:p>
+            <a:pPr indent="0" lvl="0" marL="0" marR="0" rtl="0" algn="l">
+              <a:spcBef>
+                <a:spcPts val="0"/>
+              </a:spcBef>
+              <a:spcAft>
+                <a:spcPts val="0"/>
+              </a:spcAft>
+              <a:buNone/>
+            </a:pPr>
+            <a:r>
+              <a:rPr b="1" lang="en-US" sz="1100">
+                <a:solidFill>
+                  <a:srgbClr val="87D9D7"/>
+                </a:solidFill>
+              </a:rPr>
+              <a:t>Trace one prediction</a:t>
+            </a:r>
+            <a:endParaRPr/>
+          </a:p>
+        </p:txBody>
+      </p:sp>
+      <p:sp>
+        <p:nvSpPr>
+          <p:cNvPr id="289" name="Google Shape;289;p20"/>
+          <p:cNvSpPr txBox="1"/>
+          <p:nvPr/>
+        </p:nvSpPr>
+        <p:spPr>
+          <a:xfrm>
+            <a:off x="1719072" y="1847088"/>
+            <a:ext cx="9052500" cy="292500"/>
+          </a:xfrm>
+          <a:prstGeom prst="rect">
+            <a:avLst/>
+          </a:prstGeom>
+          <a:noFill/>
+          <a:ln>
+            <a:noFill/>
+          </a:ln>
+        </p:spPr>
+        <p:txBody>
+          <a:bodyPr anchorCtr="0" anchor="ctr" bIns="18275" lIns="18275" spcFirstLastPara="1" rIns="18275" wrap="square" tIns="18275">
+            <a:noAutofit/>
+          </a:bodyPr>
+          <a:lstStyle/>
+          <a:p>
+            <a:pPr indent="0" lvl="0" marL="0" marR="0" rtl="0" algn="l">
+              <a:spcBef>
+                <a:spcPts val="0"/>
+              </a:spcBef>
+              <a:spcAft>
+                <a:spcPts val="0"/>
+              </a:spcAft>
+              <a:buNone/>
+            </a:pPr>
+            <a:r>
+              <a:rPr b="1" lang="en-US" sz="1600">
+                <a:solidFill>
+                  <a:srgbClr val="FFFFFF"/>
+                </a:solidFill>
+              </a:rPr>
+              <a:t>Field input → scalar energy → derivatives → response outputs</a:t>
+            </a:r>
+            <a:endParaRPr/>
+          </a:p>
+        </p:txBody>
+      </p:sp>
+      <p:sp>
+        <p:nvSpPr>
+          <p:cNvPr id="290" name="Google Shape;290;p20"/>
+          <p:cNvSpPr/>
+          <p:nvPr/>
+        </p:nvSpPr>
+        <p:spPr>
+          <a:xfrm>
+            <a:off x="622300" y="2578100"/>
+            <a:ext cx="6921600" cy="3098700"/>
+          </a:xfrm>
+          <a:prstGeom prst="roundRect">
+            <a:avLst>
+              <a:gd fmla="val 8000" name="adj"/>
+            </a:avLst>
+          </a:prstGeom>
+          <a:solidFill>
+            <a:srgbClr val="FFFFFF"/>
+          </a:solidFill>
+          <a:ln cap="flat" cmpd="sng" w="15225">
+            <a:solidFill>
+              <a:srgbClr val="E9EFF4"/>
+            </a:solidFill>
+            <a:prstDash val="solid"/>
+            <a:round/>
+            <a:headEnd len="sm" w="sm" type="none"/>
+            <a:tailEnd len="sm" w="sm" type="none"/>
+          </a:ln>
+          <a:effectLst>
+            <a:outerShdw blurRad="40000" rotWithShape="0" dir="5400000" dist="23000">
+              <a:srgbClr val="000000">
+                <a:alpha val="34900"/>
+              </a:srgbClr>
+            </a:outerShdw>
+          </a:effectLst>
+        </p:spPr>
+        <p:txBody>
+          <a:bodyPr anchorCtr="0" anchor="ctr" bIns="45700" lIns="91425" spcFirstLastPara="1" rIns="91425" wrap="square" tIns="45700">
+            <a:noAutofit/>
+          </a:bodyPr>
+          <a:lstStyle/>
+          <a:p>
+            <a:pPr indent="0" lvl="0" marL="0" marR="0" rtl="0" algn="ctr">
+              <a:spcBef>
+                <a:spcPts val="0"/>
+              </a:spcBef>
+              <a:spcAft>
+                <a:spcPts val="0"/>
+              </a:spcAft>
+              <a:buNone/>
+            </a:pPr>
+            <a:r>
+              <a:t/>
+            </a:r>
+            <a:endParaRPr b="0" i="0" sz="1800" u="none" cap="none" strike="noStrike">
+              <a:solidFill>
+                <a:schemeClr val="dk1"/>
+              </a:solidFill>
+              <a:latin typeface="Calibri"/>
+              <a:ea typeface="Calibri"/>
+              <a:cs typeface="Calibri"/>
+              <a:sym typeface="Calibri"/>
+            </a:endParaRPr>
+          </a:p>
+        </p:txBody>
+      </p:sp>
+      <p:sp>
+        <p:nvSpPr>
+          <p:cNvPr id="291" name="Google Shape;291;p20"/>
+          <p:cNvSpPr/>
+          <p:nvPr/>
+        </p:nvSpPr>
+        <p:spPr>
+          <a:xfrm>
+            <a:off x="622300" y="2578100"/>
+            <a:ext cx="73800" cy="3098700"/>
+          </a:xfrm>
+          <a:prstGeom prst="rect">
+            <a:avLst/>
+          </a:prstGeom>
+          <a:solidFill>
+            <a:srgbClr val="25848B"/>
+          </a:solidFill>
+          <a:ln>
+            <a:noFill/>
+          </a:ln>
+          <a:effectLst>
+            <a:outerShdw blurRad="40000" rotWithShape="0" dir="5400000" dist="23000">
+              <a:srgbClr val="000000">
+                <a:alpha val="34900"/>
+              </a:srgbClr>
+            </a:outerShdw>
+          </a:effectLst>
+        </p:spPr>
+        <p:txBody>
+          <a:bodyPr anchorCtr="0" anchor="ctr" bIns="45700" lIns="91425" spcFirstLastPara="1" rIns="91425" wrap="square" tIns="45700">
+            <a:noAutofit/>
+          </a:bodyPr>
+          <a:lstStyle/>
+          <a:p>
+            <a:pPr indent="0" lvl="0" marL="0" marR="0" rtl="0" algn="ctr">
+              <a:spcBef>
+                <a:spcPts val="0"/>
+              </a:spcBef>
+              <a:spcAft>
+                <a:spcPts val="0"/>
+              </a:spcAft>
+              <a:buNone/>
+            </a:pPr>
+            <a:r>
+              <a:t/>
+            </a:r>
+            <a:endParaRPr b="0" i="0" sz="1800" u="none" cap="none" strike="noStrike">
+              <a:solidFill>
+                <a:schemeClr val="dk1"/>
+              </a:solidFill>
+              <a:latin typeface="Calibri"/>
+              <a:ea typeface="Calibri"/>
+              <a:cs typeface="Calibri"/>
+              <a:sym typeface="Calibri"/>
+            </a:endParaRPr>
+          </a:p>
+        </p:txBody>
+      </p:sp>
+      <p:sp>
+        <p:nvSpPr>
+          <p:cNvPr id="292" name="Google Shape;292;p20"/>
+          <p:cNvSpPr txBox="1"/>
+          <p:nvPr/>
+        </p:nvSpPr>
+        <p:spPr>
+          <a:xfrm>
+            <a:off x="841248" y="2724912"/>
+            <a:ext cx="4901100" cy="274200"/>
+          </a:xfrm>
+          <a:prstGeom prst="rect">
+            <a:avLst/>
+          </a:prstGeom>
+          <a:noFill/>
+          <a:ln>
+            <a:noFill/>
+          </a:ln>
+        </p:spPr>
+        <p:txBody>
+          <a:bodyPr anchorCtr="0" anchor="ctr" bIns="18275" lIns="18275" spcFirstLastPara="1" rIns="18275" wrap="square" tIns="18275">
+            <a:noAutofit/>
+          </a:bodyPr>
+          <a:lstStyle/>
+          <a:p>
+            <a:pPr indent="0" lvl="0" marL="0" marR="0" rtl="0" algn="l">
+              <a:spcBef>
+                <a:spcPts val="0"/>
+              </a:spcBef>
+              <a:spcAft>
+                <a:spcPts val="0"/>
+              </a:spcAft>
+              <a:buNone/>
+            </a:pPr>
+            <a:r>
+              <a:rPr b="1" lang="en-US">
+                <a:solidFill>
+                  <a:srgbClr val="183148"/>
+                </a:solidFill>
+              </a:rPr>
+              <a:t>CODEBASE TREE</a:t>
+            </a:r>
+            <a:endParaRPr b="1">
+              <a:solidFill>
+                <a:srgbClr val="183148"/>
+              </a:solidFill>
+            </a:endParaRPr>
+          </a:p>
+        </p:txBody>
+      </p:sp>
+      <p:sp>
+        <p:nvSpPr>
+          <p:cNvPr id="293" name="Google Shape;293;p20"/>
+          <p:cNvSpPr txBox="1"/>
+          <p:nvPr/>
+        </p:nvSpPr>
+        <p:spPr>
+          <a:xfrm>
+            <a:off x="840740" y="3054350"/>
+            <a:ext cx="6477000" cy="2540100"/>
+          </a:xfrm>
+          <a:prstGeom prst="rect">
+            <a:avLst/>
+          </a:prstGeom>
+          <a:noFill/>
+          <a:ln>
+            <a:noFill/>
+          </a:ln>
+        </p:spPr>
+        <p:txBody>
+          <a:bodyPr anchorCtr="0" anchor="ctr" bIns="18275" lIns="18275" spcFirstLastPara="1" rIns="18275" wrap="square" tIns="18275">
+            <a:noAutofit/>
+          </a:bodyPr>
+          <a:lstStyle/>
+          <a:p>
+            <a:pPr indent="0" lvl="0" marL="0" marR="0" rtl="0" algn="l">
+              <a:lnSpc>
+                <a:spcPct val="93000"/>
+              </a:lnSpc>
+              <a:spcBef>
+                <a:spcPts val="0"/>
+              </a:spcBef>
+              <a:spcAft>
+                <a:spcPts val="0"/>
+              </a:spcAft>
+              <a:buNone/>
+            </a:pPr>
+            <a:r>
+              <a:rPr b="1" lang="en-US" sz="1200">
+                <a:solidFill>
+                  <a:srgbClr val="183148"/>
+                </a:solidFill>
+                <a:latin typeface="Courier New"/>
+                <a:ea typeface="Courier New"/>
+                <a:cs typeface="Courier New"/>
+                <a:sym typeface="Courier New"/>
+              </a:rPr>
+              <a:t>mace-field/</a:t>
+            </a:r>
+            <a:endParaRPr b="1" sz="1200">
+              <a:solidFill>
+                <a:srgbClr val="183148"/>
+              </a:solidFill>
+              <a:latin typeface="Courier New"/>
+              <a:ea typeface="Courier New"/>
+              <a:cs typeface="Courier New"/>
+              <a:sym typeface="Courier New"/>
+            </a:endParaRPr>
+          </a:p>
+          <a:p>
+            <a:pPr indent="0" lvl="0" marL="0" marR="0" rtl="0" algn="l">
+              <a:lnSpc>
+                <a:spcPct val="93000"/>
+              </a:lnSpc>
+              <a:spcBef>
+                <a:spcPts val="0"/>
+              </a:spcBef>
+              <a:spcAft>
+                <a:spcPts val="0"/>
+              </a:spcAft>
+              <a:buNone/>
+            </a:pPr>
+            <a:r>
+              <a:rPr b="1" lang="en-US" sz="1200">
+                <a:solidFill>
+                  <a:srgbClr val="183148"/>
+                </a:solidFill>
+                <a:latin typeface="Courier New"/>
+                <a:ea typeface="Courier New"/>
+                <a:cs typeface="Courier New"/>
+                <a:sym typeface="Courier New"/>
+              </a:rPr>
+              <a:t>└── mace/</a:t>
+            </a:r>
+            <a:endParaRPr b="1" sz="1200">
+              <a:solidFill>
+                <a:srgbClr val="183148"/>
+              </a:solidFill>
+              <a:latin typeface="Courier New"/>
+              <a:ea typeface="Courier New"/>
+              <a:cs typeface="Courier New"/>
+              <a:sym typeface="Courier New"/>
+            </a:endParaRPr>
+          </a:p>
+          <a:p>
+            <a:pPr indent="0" lvl="0" marL="0" marR="0" rtl="0" algn="l">
+              <a:lnSpc>
+                <a:spcPct val="93000"/>
+              </a:lnSpc>
+              <a:spcBef>
+                <a:spcPts val="0"/>
+              </a:spcBef>
+              <a:spcAft>
+                <a:spcPts val="0"/>
+              </a:spcAft>
+              <a:buNone/>
+            </a:pPr>
+            <a:r>
+              <a:rPr b="1" lang="en-US" sz="1200">
+                <a:solidFill>
+                  <a:srgbClr val="25848B"/>
+                </a:solidFill>
+                <a:latin typeface="Courier New"/>
+                <a:ea typeface="Courier New"/>
+                <a:cs typeface="Courier New"/>
+                <a:sym typeface="Courier New"/>
+              </a:rPr>
+              <a:t>    ├── data/ · utils.py · atomic_data.py</a:t>
+            </a:r>
+            <a:endParaRPr b="1" sz="1200">
+              <a:solidFill>
+                <a:srgbClr val="25848B"/>
+              </a:solidFill>
+              <a:latin typeface="Courier New"/>
+              <a:ea typeface="Courier New"/>
+              <a:cs typeface="Courier New"/>
+              <a:sym typeface="Courier New"/>
+            </a:endParaRPr>
+          </a:p>
+          <a:p>
+            <a:pPr indent="0" lvl="0" marL="0" marR="0" rtl="0" algn="l">
+              <a:lnSpc>
+                <a:spcPct val="93000"/>
+              </a:lnSpc>
+              <a:spcBef>
+                <a:spcPts val="0"/>
+              </a:spcBef>
+              <a:spcAft>
+                <a:spcPts val="0"/>
+              </a:spcAft>
+              <a:buNone/>
+            </a:pPr>
+            <a:r>
+              <a:rPr b="1" lang="en-US" sz="1200">
+                <a:solidFill>
+                  <a:srgbClr val="437EAB"/>
+                </a:solidFill>
+                <a:latin typeface="Courier New"/>
+                <a:ea typeface="Courier New"/>
+                <a:cs typeface="Courier New"/>
+                <a:sym typeface="Courier New"/>
+              </a:rPr>
+              <a:t>    ├── modules/</a:t>
+            </a:r>
+            <a:endParaRPr b="1" sz="1200">
+              <a:solidFill>
+                <a:srgbClr val="437EAB"/>
+              </a:solidFill>
+              <a:latin typeface="Courier New"/>
+              <a:ea typeface="Courier New"/>
+              <a:cs typeface="Courier New"/>
+              <a:sym typeface="Courier New"/>
+            </a:endParaRPr>
+          </a:p>
+          <a:p>
+            <a:pPr indent="0" lvl="0" marL="0" marR="0" rtl="0" algn="l">
+              <a:lnSpc>
+                <a:spcPct val="93000"/>
+              </a:lnSpc>
+              <a:spcBef>
+                <a:spcPts val="0"/>
+              </a:spcBef>
+              <a:spcAft>
+                <a:spcPts val="0"/>
+              </a:spcAft>
+              <a:buNone/>
+            </a:pPr>
+            <a:r>
+              <a:rPr b="1" lang="en-US" sz="1200">
+                <a:solidFill>
+                  <a:srgbClr val="437EAB"/>
+                </a:solidFill>
+                <a:latin typeface="Courier New"/>
+                <a:ea typeface="Courier New"/>
+                <a:cs typeface="Courier New"/>
+                <a:sym typeface="Courier New"/>
+              </a:rPr>
+              <a:t>    │   ├── models.py · extensions.py</a:t>
+            </a:r>
+            <a:endParaRPr b="1" sz="1200">
+              <a:solidFill>
+                <a:srgbClr val="437EAB"/>
+              </a:solidFill>
+              <a:latin typeface="Courier New"/>
+              <a:ea typeface="Courier New"/>
+              <a:cs typeface="Courier New"/>
+              <a:sym typeface="Courier New"/>
+            </a:endParaRPr>
+          </a:p>
+          <a:p>
+            <a:pPr indent="0" lvl="0" marL="0" marR="0" rtl="0" algn="l">
+              <a:lnSpc>
+                <a:spcPct val="93000"/>
+              </a:lnSpc>
+              <a:spcBef>
+                <a:spcPts val="0"/>
+              </a:spcBef>
+              <a:spcAft>
+                <a:spcPts val="0"/>
+              </a:spcAft>
+              <a:buNone/>
+            </a:pPr>
+            <a:r>
+              <a:rPr b="1" lang="en-US" sz="1200">
+                <a:solidFill>
+                  <a:srgbClr val="437EAB"/>
+                </a:solidFill>
+                <a:latin typeface="Courier New"/>
+                <a:ea typeface="Courier New"/>
+                <a:cs typeface="Courier New"/>
+                <a:sym typeface="Courier New"/>
+              </a:rPr>
+              <a:t>    │   ├── field_blocks.py · blocks.py</a:t>
+            </a:r>
+            <a:endParaRPr b="1" sz="1200">
+              <a:solidFill>
+                <a:srgbClr val="437EAB"/>
+              </a:solidFill>
+              <a:latin typeface="Courier New"/>
+              <a:ea typeface="Courier New"/>
+              <a:cs typeface="Courier New"/>
+              <a:sym typeface="Courier New"/>
+            </a:endParaRPr>
+          </a:p>
+          <a:p>
+            <a:pPr indent="0" lvl="0" marL="0" marR="0" rtl="0" algn="l">
+              <a:lnSpc>
+                <a:spcPct val="93000"/>
+              </a:lnSpc>
+              <a:spcBef>
+                <a:spcPts val="0"/>
+              </a:spcBef>
+              <a:spcAft>
+                <a:spcPts val="0"/>
+              </a:spcAft>
+              <a:buNone/>
+            </a:pPr>
+            <a:r>
+              <a:rPr b="1" lang="en-US" sz="1200">
+                <a:solidFill>
+                  <a:srgbClr val="BF554E"/>
+                </a:solidFill>
+                <a:latin typeface="Courier New"/>
+                <a:ea typeface="Courier New"/>
+                <a:cs typeface="Courier New"/>
+                <a:sym typeface="Courier New"/>
+              </a:rPr>
+              <a:t>    │   └── utils.py · loss.py</a:t>
+            </a:r>
+            <a:endParaRPr b="1" sz="1200">
+              <a:solidFill>
+                <a:srgbClr val="BF554E"/>
+              </a:solidFill>
+              <a:latin typeface="Courier New"/>
+              <a:ea typeface="Courier New"/>
+              <a:cs typeface="Courier New"/>
+              <a:sym typeface="Courier New"/>
+            </a:endParaRPr>
+          </a:p>
+          <a:p>
+            <a:pPr indent="0" lvl="0" marL="0" marR="0" rtl="0" algn="l">
+              <a:lnSpc>
+                <a:spcPct val="93000"/>
+              </a:lnSpc>
+              <a:spcBef>
+                <a:spcPts val="0"/>
+              </a:spcBef>
+              <a:spcAft>
+                <a:spcPts val="0"/>
+              </a:spcAft>
+              <a:buNone/>
+            </a:pPr>
+            <a:r>
+              <a:rPr b="1" lang="en-US" sz="1200">
+                <a:solidFill>
+                  <a:srgbClr val="488F69"/>
+                </a:solidFill>
+                <a:latin typeface="Courier New"/>
+                <a:ea typeface="Courier New"/>
+                <a:cs typeface="Courier New"/>
+                <a:sym typeface="Courier New"/>
+              </a:rPr>
+              <a:t>    ├── tools/</a:t>
+            </a:r>
+            <a:endParaRPr b="1" sz="1200">
+              <a:solidFill>
+                <a:srgbClr val="488F69"/>
+              </a:solidFill>
+              <a:latin typeface="Courier New"/>
+              <a:ea typeface="Courier New"/>
+              <a:cs typeface="Courier New"/>
+              <a:sym typeface="Courier New"/>
+            </a:endParaRPr>
+          </a:p>
+          <a:p>
+            <a:pPr indent="0" lvl="0" marL="0" marR="0" rtl="0" algn="l">
+              <a:lnSpc>
+                <a:spcPct val="93000"/>
+              </a:lnSpc>
+              <a:spcBef>
+                <a:spcPts val="0"/>
+              </a:spcBef>
+              <a:spcAft>
+                <a:spcPts val="0"/>
+              </a:spcAft>
+              <a:buNone/>
+            </a:pPr>
+            <a:r>
+              <a:rPr b="1" lang="en-US" sz="1200">
+                <a:solidFill>
+                  <a:srgbClr val="488F69"/>
+                </a:solidFill>
+                <a:latin typeface="Courier New"/>
+                <a:ea typeface="Courier New"/>
+                <a:cs typeface="Courier New"/>
+                <a:sym typeface="Courier New"/>
+              </a:rPr>
+              <a:t>    │   ├── default_keys.py · arg_parser.py</a:t>
+            </a:r>
+            <a:endParaRPr b="1" sz="1200">
+              <a:solidFill>
+                <a:srgbClr val="488F69"/>
+              </a:solidFill>
+              <a:latin typeface="Courier New"/>
+              <a:ea typeface="Courier New"/>
+              <a:cs typeface="Courier New"/>
+              <a:sym typeface="Courier New"/>
+            </a:endParaRPr>
+          </a:p>
+          <a:p>
+            <a:pPr indent="0" lvl="0" marL="0" marR="0" rtl="0" algn="l">
+              <a:lnSpc>
+                <a:spcPct val="93000"/>
+              </a:lnSpc>
+              <a:spcBef>
+                <a:spcPts val="0"/>
+              </a:spcBef>
+              <a:spcAft>
+                <a:spcPts val="0"/>
+              </a:spcAft>
+              <a:buNone/>
+            </a:pPr>
+            <a:r>
+              <a:rPr b="1" lang="en-US" sz="1200">
+                <a:solidFill>
+                  <a:srgbClr val="488F69"/>
+                </a:solidFill>
+                <a:latin typeface="Courier New"/>
+                <a:ea typeface="Courier New"/>
+                <a:cs typeface="Courier New"/>
+                <a:sym typeface="Courier New"/>
+              </a:rPr>
+              <a:t>    │   ├── model_script_utils.py</a:t>
+            </a:r>
+            <a:endParaRPr b="1" sz="1200">
+              <a:solidFill>
+                <a:srgbClr val="488F69"/>
+              </a:solidFill>
+              <a:latin typeface="Courier New"/>
+              <a:ea typeface="Courier New"/>
+              <a:cs typeface="Courier New"/>
+              <a:sym typeface="Courier New"/>
+            </a:endParaRPr>
+          </a:p>
+          <a:p>
+            <a:pPr indent="0" lvl="0" marL="0" marR="0" rtl="0" algn="l">
+              <a:lnSpc>
+                <a:spcPct val="93000"/>
+              </a:lnSpc>
+              <a:spcBef>
+                <a:spcPts val="0"/>
+              </a:spcBef>
+              <a:spcAft>
+                <a:spcPts val="0"/>
+              </a:spcAft>
+              <a:buNone/>
+            </a:pPr>
+            <a:r>
+              <a:rPr b="1" lang="en-US" sz="1200">
+                <a:solidFill>
+                  <a:srgbClr val="488F69"/>
+                </a:solidFill>
+                <a:latin typeface="Courier New"/>
+                <a:ea typeface="Courier New"/>
+                <a:cs typeface="Courier New"/>
+                <a:sym typeface="Courier New"/>
+              </a:rPr>
+              <a:t>    │   └── finetuning_utils.py</a:t>
+            </a:r>
+            <a:endParaRPr b="1" sz="1200">
+              <a:solidFill>
+                <a:srgbClr val="488F69"/>
+              </a:solidFill>
+              <a:latin typeface="Courier New"/>
+              <a:ea typeface="Courier New"/>
+              <a:cs typeface="Courier New"/>
+              <a:sym typeface="Courier New"/>
+            </a:endParaRPr>
+          </a:p>
+          <a:p>
+            <a:pPr indent="0" lvl="0" marL="0" marR="0" rtl="0" algn="l">
+              <a:lnSpc>
+                <a:spcPct val="93000"/>
+              </a:lnSpc>
+              <a:spcBef>
+                <a:spcPts val="0"/>
+              </a:spcBef>
+              <a:spcAft>
+                <a:spcPts val="0"/>
+              </a:spcAft>
+              <a:buNone/>
+            </a:pPr>
+            <a:r>
+              <a:rPr b="1" lang="en-US" sz="1200">
+                <a:solidFill>
+                  <a:srgbClr val="488F69"/>
+                </a:solidFill>
+                <a:latin typeface="Courier New"/>
+                <a:ea typeface="Courier New"/>
+                <a:cs typeface="Courier New"/>
+                <a:sym typeface="Courier New"/>
+              </a:rPr>
+              <a:t>    ├── cli/ · run_train.py · eval_configs.py</a:t>
+            </a:r>
+            <a:endParaRPr b="1" sz="1200">
+              <a:solidFill>
+                <a:srgbClr val="488F69"/>
+              </a:solidFill>
+              <a:latin typeface="Courier New"/>
+              <a:ea typeface="Courier New"/>
+              <a:cs typeface="Courier New"/>
+              <a:sym typeface="Courier New"/>
+            </a:endParaRPr>
+          </a:p>
+          <a:p>
+            <a:pPr indent="0" lvl="0" marL="0" marR="0" rtl="0" algn="l">
+              <a:lnSpc>
+                <a:spcPct val="93000"/>
+              </a:lnSpc>
+              <a:spcBef>
+                <a:spcPts val="0"/>
+              </a:spcBef>
+              <a:spcAft>
+                <a:spcPts val="0"/>
+              </a:spcAft>
+              <a:buNone/>
+            </a:pPr>
+            <a:r>
+              <a:rPr b="1" lang="en-US" sz="1200">
+                <a:solidFill>
+                  <a:srgbClr val="488F69"/>
+                </a:solidFill>
+                <a:latin typeface="Courier New"/>
+                <a:ea typeface="Courier New"/>
+                <a:cs typeface="Courier New"/>
+                <a:sym typeface="Courier New"/>
+              </a:rPr>
+              <a:t>    └── calculators/ · mace.py</a:t>
+            </a:r>
+            <a:endParaRPr b="1" sz="1200">
+              <a:solidFill>
+                <a:srgbClr val="488F69"/>
+              </a:solidFill>
+              <a:latin typeface="Courier New"/>
+              <a:ea typeface="Courier New"/>
+              <a:cs typeface="Courier New"/>
+              <a:sym typeface="Courier New"/>
+            </a:endParaRPr>
+          </a:p>
+        </p:txBody>
+      </p:sp>
+      <p:sp>
+        <p:nvSpPr>
+          <p:cNvPr id="294" name="Google Shape;294;p20"/>
+          <p:cNvSpPr/>
+          <p:nvPr/>
+        </p:nvSpPr>
+        <p:spPr>
+          <a:xfrm>
+            <a:off x="7759700" y="2578100"/>
+            <a:ext cx="3810000" cy="3098700"/>
+          </a:xfrm>
+          <a:prstGeom prst="roundRect">
+            <a:avLst>
+              <a:gd fmla="val 8000" name="adj"/>
+            </a:avLst>
+          </a:prstGeom>
+          <a:solidFill>
+            <a:srgbClr val="FFFFFF"/>
+          </a:solidFill>
+          <a:ln cap="flat" cmpd="sng" w="15225">
+            <a:solidFill>
+              <a:srgbClr val="E9EFF4"/>
+            </a:solidFill>
+            <a:prstDash val="solid"/>
+            <a:round/>
+            <a:headEnd len="sm" w="sm" type="none"/>
+            <a:tailEnd len="sm" w="sm" type="none"/>
+          </a:ln>
+          <a:effectLst>
+            <a:outerShdw blurRad="40000" rotWithShape="0" dir="5400000" dist="23000">
+              <a:srgbClr val="000000">
+                <a:alpha val="34900"/>
+              </a:srgbClr>
+            </a:outerShdw>
+          </a:effectLst>
+        </p:spPr>
+        <p:txBody>
+          <a:bodyPr anchorCtr="0" anchor="ctr" bIns="45700" lIns="91425" spcFirstLastPara="1" rIns="91425" wrap="square" tIns="45700">
+            <a:noAutofit/>
+          </a:bodyPr>
+          <a:lstStyle/>
+          <a:p>
+            <a:pPr indent="0" lvl="0" marL="0" marR="0" rtl="0" algn="ctr">
+              <a:spcBef>
+                <a:spcPts val="0"/>
+              </a:spcBef>
+              <a:spcAft>
+                <a:spcPts val="0"/>
+              </a:spcAft>
+              <a:buNone/>
+            </a:pPr>
+            <a:r>
+              <a:t/>
+            </a:r>
+            <a:endParaRPr b="0" i="0" sz="1800" u="none" cap="none" strike="noStrike">
+              <a:solidFill>
+                <a:schemeClr val="dk1"/>
+              </a:solidFill>
+              <a:latin typeface="Calibri"/>
+              <a:ea typeface="Calibri"/>
+              <a:cs typeface="Calibri"/>
+              <a:sym typeface="Calibri"/>
+            </a:endParaRPr>
+          </a:p>
+        </p:txBody>
+      </p:sp>
+      <p:sp>
+        <p:nvSpPr>
+          <p:cNvPr id="295" name="Google Shape;295;p20"/>
+          <p:cNvSpPr/>
+          <p:nvPr/>
+        </p:nvSpPr>
+        <p:spPr>
+          <a:xfrm>
+            <a:off x="7759700" y="2578100"/>
+            <a:ext cx="73800" cy="3098700"/>
+          </a:xfrm>
+          <a:prstGeom prst="rect">
+            <a:avLst/>
+          </a:prstGeom>
+          <a:solidFill>
+            <a:srgbClr val="437EAB"/>
+          </a:solidFill>
+          <a:ln>
+            <a:noFill/>
+          </a:ln>
+          <a:effectLst>
+            <a:outerShdw blurRad="40000" rotWithShape="0" dir="5400000" dist="23000">
+              <a:srgbClr val="000000">
+                <a:alpha val="34900"/>
+              </a:srgbClr>
+            </a:outerShdw>
+          </a:effectLst>
+        </p:spPr>
+        <p:txBody>
+          <a:bodyPr anchorCtr="0" anchor="ctr" bIns="45700" lIns="91425" spcFirstLastPara="1" rIns="91425" wrap="square" tIns="45700">
+            <a:noAutofit/>
+          </a:bodyPr>
+          <a:lstStyle/>
+          <a:p>
+            <a:pPr indent="0" lvl="0" marL="0" marR="0" rtl="0" algn="ctr">
+              <a:spcBef>
+                <a:spcPts val="0"/>
+              </a:spcBef>
+              <a:spcAft>
+                <a:spcPts val="0"/>
+              </a:spcAft>
+              <a:buNone/>
+            </a:pPr>
+            <a:r>
+              <a:t/>
+            </a:r>
+            <a:endParaRPr b="0" i="0" sz="1800" u="none" cap="none" strike="noStrike">
+              <a:solidFill>
+                <a:schemeClr val="dk1"/>
+              </a:solidFill>
+              <a:latin typeface="Calibri"/>
+              <a:ea typeface="Calibri"/>
+              <a:cs typeface="Calibri"/>
+              <a:sym typeface="Calibri"/>
+            </a:endParaRPr>
+          </a:p>
+        </p:txBody>
+      </p:sp>
+      <p:sp>
+        <p:nvSpPr>
+          <p:cNvPr id="296" name="Google Shape;296;p20"/>
+          <p:cNvSpPr txBox="1"/>
+          <p:nvPr/>
+        </p:nvSpPr>
+        <p:spPr>
+          <a:xfrm>
+            <a:off x="7962900" y="2725420"/>
+            <a:ext cx="3403500" cy="274200"/>
+          </a:xfrm>
+          <a:prstGeom prst="rect">
+            <a:avLst/>
+          </a:prstGeom>
+          <a:noFill/>
+          <a:ln>
+            <a:noFill/>
+          </a:ln>
+        </p:spPr>
+        <p:txBody>
+          <a:bodyPr anchorCtr="0" anchor="ctr" bIns="18275" lIns="18275" spcFirstLastPara="1" rIns="18275" wrap="square" tIns="18275">
+            <a:noAutofit/>
+          </a:bodyPr>
+          <a:lstStyle/>
+          <a:p>
+            <a:pPr indent="0" lvl="0" marL="0" marR="0" rtl="0" algn="l">
+              <a:spcBef>
+                <a:spcPts val="0"/>
+              </a:spcBef>
+              <a:spcAft>
+                <a:spcPts val="0"/>
+              </a:spcAft>
+              <a:buNone/>
+            </a:pPr>
+            <a:r>
+              <a:rPr b="1" lang="en-US">
+                <a:solidFill>
+                  <a:srgbClr val="183148"/>
+                </a:solidFill>
+              </a:rPr>
+              <a:t>EXTENSION TOUCHPOINTS</a:t>
+            </a:r>
+            <a:endParaRPr b="1">
+              <a:solidFill>
+                <a:srgbClr val="183148"/>
+              </a:solidFill>
+            </a:endParaRPr>
+          </a:p>
+        </p:txBody>
+      </p:sp>
+      <p:sp>
+        <p:nvSpPr>
+          <p:cNvPr id="297" name="Google Shape;297;p20"/>
+          <p:cNvSpPr txBox="1"/>
+          <p:nvPr/>
+        </p:nvSpPr>
+        <p:spPr>
+          <a:xfrm>
+            <a:off x="660400" y="5867400"/>
+            <a:ext cx="10794900" cy="304800"/>
+          </a:xfrm>
+          <a:prstGeom prst="rect">
+            <a:avLst/>
+          </a:prstGeom>
+          <a:noFill/>
+          <a:ln>
+            <a:noFill/>
+          </a:ln>
+        </p:spPr>
+        <p:txBody>
+          <a:bodyPr anchorCtr="0" anchor="ctr" bIns="18275" lIns="18275" spcFirstLastPara="1" rIns="18275" wrap="square" tIns="18275">
+            <a:noAutofit/>
+          </a:bodyPr>
+          <a:lstStyle/>
+          <a:p>
+            <a:pPr indent="0" lvl="0" marL="0" marR="0" rtl="0" algn="l">
+              <a:lnSpc>
+                <a:spcPct val="100000"/>
+              </a:lnSpc>
+              <a:spcBef>
+                <a:spcPts val="0"/>
+              </a:spcBef>
+              <a:spcAft>
+                <a:spcPts val="0"/>
+              </a:spcAft>
+              <a:buNone/>
+            </a:pPr>
+            <a:r>
+              <a:rPr lang="en-US" sz="1050">
+                <a:solidFill>
+                  <a:srgbClr val="536676"/>
+                </a:solidFill>
+              </a:rPr>
+              <a:t>Adapt the extension-specific interfaces first; change shared MACE operations only when the common feature path must change.</a:t>
+            </a:r>
+            <a:endParaRPr sz="1050">
+              <a:solidFill>
+                <a:srgbClr val="536676"/>
+              </a:solidFill>
+            </a:endParaRPr>
+          </a:p>
+        </p:txBody>
+      </p:sp>
+      <p:sp>
+        <p:nvSpPr>
+          <p:cNvPr id="298" name="Google Shape;298;p20"/>
+          <p:cNvSpPr txBox="1"/>
+          <p:nvPr/>
+        </p:nvSpPr>
+        <p:spPr>
+          <a:xfrm>
+            <a:off x="7962900" y="3060700"/>
+            <a:ext cx="3403500" cy="2514600"/>
+          </a:xfrm>
+          <a:prstGeom prst="rect">
+            <a:avLst/>
+          </a:prstGeom>
+          <a:noFill/>
+          <a:ln>
+            <a:noFill/>
+          </a:ln>
+        </p:spPr>
+        <p:txBody>
+          <a:bodyPr anchorCtr="0" anchor="t" bIns="91425" lIns="91425" spcFirstLastPara="1" rIns="91425" wrap="square" tIns="91425">
+            <a:noAutofit/>
+          </a:bodyPr>
+          <a:lstStyle/>
+          <a:p>
+            <a:pPr indent="0" lvl="0" marL="0" rtl="0" algn="l">
+              <a:lnSpc>
+                <a:spcPct val="98000"/>
+              </a:lnSpc>
+              <a:spcBef>
+                <a:spcPts val="0"/>
+              </a:spcBef>
+              <a:spcAft>
+                <a:spcPts val="0"/>
+              </a:spcAft>
+              <a:buNone/>
+            </a:pPr>
+            <a:r>
+              <a:rPr b="1" lang="en-US" sz="1200">
+                <a:solidFill>
+                  <a:srgbClr val="25848B"/>
+                </a:solidFill>
+              </a:rPr>
+              <a:t>DATA + CONFIG</a:t>
+            </a:r>
+            <a:endParaRPr b="1" sz="1200">
+              <a:solidFill>
+                <a:srgbClr val="25848B"/>
+              </a:solidFill>
+            </a:endParaRPr>
+          </a:p>
+          <a:p>
+            <a:pPr indent="0" lvl="0" marL="0" rtl="0" algn="l">
+              <a:lnSpc>
+                <a:spcPct val="98000"/>
+              </a:lnSpc>
+              <a:spcBef>
+                <a:spcPts val="0"/>
+              </a:spcBef>
+              <a:spcAft>
+                <a:spcPts val="0"/>
+              </a:spcAft>
+              <a:buNone/>
+            </a:pPr>
+            <a:r>
+              <a:rPr lang="en-US" sz="1200">
+                <a:solidFill>
+                  <a:srgbClr val="4D6373"/>
+                </a:solidFill>
+              </a:rPr>
+              <a:t>data/utils.py · atomic_data.py</a:t>
+            </a:r>
+            <a:endParaRPr sz="1200">
+              <a:solidFill>
+                <a:srgbClr val="4D6373"/>
+              </a:solidFill>
+            </a:endParaRPr>
+          </a:p>
+          <a:p>
+            <a:pPr indent="0" lvl="0" marL="0" rtl="0" algn="l">
+              <a:lnSpc>
+                <a:spcPct val="98000"/>
+              </a:lnSpc>
+              <a:spcBef>
+                <a:spcPts val="0"/>
+              </a:spcBef>
+              <a:spcAft>
+                <a:spcPts val="0"/>
+              </a:spcAft>
+              <a:buNone/>
+            </a:pPr>
+            <a:r>
+              <a:rPr lang="en-US" sz="1200">
+                <a:solidFill>
+                  <a:srgbClr val="4D6373"/>
+                </a:solidFill>
+              </a:rPr>
+              <a:t>default_keys.py · arg_parser.py</a:t>
+            </a:r>
+            <a:endParaRPr sz="1200">
+              <a:solidFill>
+                <a:srgbClr val="4D6373"/>
+              </a:solidFill>
+            </a:endParaRPr>
+          </a:p>
+          <a:p>
+            <a:pPr indent="0" lvl="0" marL="0" rtl="0" algn="l">
+              <a:lnSpc>
+                <a:spcPct val="98000"/>
+              </a:lnSpc>
+              <a:spcBef>
+                <a:spcPts val="0"/>
+              </a:spcBef>
+              <a:spcAft>
+                <a:spcPts val="0"/>
+              </a:spcAft>
+              <a:buNone/>
+            </a:pPr>
+            <a:r>
+              <a:rPr b="1" lang="en-US" sz="1200">
+                <a:solidFill>
+                  <a:srgbClr val="437EAB"/>
+                </a:solidFill>
+              </a:rPr>
+              <a:t>MODEL</a:t>
+            </a:r>
+            <a:endParaRPr b="1" sz="1200">
+              <a:solidFill>
+                <a:srgbClr val="437EAB"/>
+              </a:solidFill>
+            </a:endParaRPr>
+          </a:p>
+          <a:p>
+            <a:pPr indent="0" lvl="0" marL="0" rtl="0" algn="l">
+              <a:lnSpc>
+                <a:spcPct val="98000"/>
+              </a:lnSpc>
+              <a:spcBef>
+                <a:spcPts val="0"/>
+              </a:spcBef>
+              <a:spcAft>
+                <a:spcPts val="0"/>
+              </a:spcAft>
+              <a:buNone/>
+            </a:pPr>
+            <a:r>
+              <a:rPr lang="en-US" sz="1200">
+                <a:solidFill>
+                  <a:srgbClr val="4D6373"/>
+                </a:solidFill>
+              </a:rPr>
+              <a:t>models.py → extensions.py · field_blocks.py</a:t>
+            </a:r>
+            <a:endParaRPr sz="1200">
+              <a:solidFill>
+                <a:srgbClr val="4D6373"/>
+              </a:solidFill>
+            </a:endParaRPr>
+          </a:p>
+          <a:p>
+            <a:pPr indent="0" lvl="0" marL="0" rtl="0" algn="l">
+              <a:lnSpc>
+                <a:spcPct val="98000"/>
+              </a:lnSpc>
+              <a:spcBef>
+                <a:spcPts val="0"/>
+              </a:spcBef>
+              <a:spcAft>
+                <a:spcPts val="0"/>
+              </a:spcAft>
+              <a:buNone/>
+            </a:pPr>
+            <a:r>
+              <a:rPr lang="en-US" sz="1200">
+                <a:solidFill>
+                  <a:srgbClr val="4D6373"/>
+                </a:solidFill>
+              </a:rPr>
+              <a:t>blocks.py only for shared-operation changes</a:t>
+            </a:r>
+            <a:endParaRPr sz="1200">
+              <a:solidFill>
+                <a:srgbClr val="4D6373"/>
+              </a:solidFill>
+            </a:endParaRPr>
+          </a:p>
+          <a:p>
+            <a:pPr indent="0" lvl="0" marL="0" rtl="0" algn="l">
+              <a:lnSpc>
+                <a:spcPct val="98000"/>
+              </a:lnSpc>
+              <a:spcBef>
+                <a:spcPts val="0"/>
+              </a:spcBef>
+              <a:spcAft>
+                <a:spcPts val="0"/>
+              </a:spcAft>
+              <a:buNone/>
+            </a:pPr>
+            <a:r>
+              <a:rPr b="1" lang="en-US" sz="1200">
+                <a:solidFill>
+                  <a:srgbClr val="BF554E"/>
+                </a:solidFill>
+              </a:rPr>
+              <a:t>DERIVATIVES + LOSS</a:t>
+            </a:r>
+            <a:endParaRPr b="1" sz="1200">
+              <a:solidFill>
+                <a:srgbClr val="BF554E"/>
+              </a:solidFill>
+            </a:endParaRPr>
+          </a:p>
+          <a:p>
+            <a:pPr indent="0" lvl="0" marL="0" rtl="0" algn="l">
+              <a:lnSpc>
+                <a:spcPct val="98000"/>
+              </a:lnSpc>
+              <a:spcBef>
+                <a:spcPts val="0"/>
+              </a:spcBef>
+              <a:spcAft>
+                <a:spcPts val="0"/>
+              </a:spcAft>
+              <a:buNone/>
+            </a:pPr>
+            <a:r>
+              <a:rPr lang="en-US" sz="1200">
+                <a:solidFill>
+                  <a:srgbClr val="4D6373"/>
+                </a:solidFill>
+              </a:rPr>
+              <a:t>modules/utils.py · autograd for P, BECs, χ</a:t>
+            </a:r>
+            <a:endParaRPr sz="1200">
+              <a:solidFill>
+                <a:srgbClr val="4D6373"/>
+              </a:solidFill>
+            </a:endParaRPr>
+          </a:p>
+          <a:p>
+            <a:pPr indent="0" lvl="0" marL="0" rtl="0" algn="l">
+              <a:lnSpc>
+                <a:spcPct val="98000"/>
+              </a:lnSpc>
+              <a:spcBef>
+                <a:spcPts val="0"/>
+              </a:spcBef>
+              <a:spcAft>
+                <a:spcPts val="0"/>
+              </a:spcAft>
+              <a:buNone/>
+            </a:pPr>
+            <a:r>
+              <a:rPr lang="en-US" sz="1200">
+                <a:solidFill>
+                  <a:srgbClr val="4D6373"/>
+                </a:solidFill>
+              </a:rPr>
+              <a:t>modules/loss.py · folds periodic P branches</a:t>
+            </a:r>
+            <a:endParaRPr sz="1200">
+              <a:solidFill>
+                <a:srgbClr val="4D6373"/>
+              </a:solidFill>
+            </a:endParaRPr>
+          </a:p>
+          <a:p>
+            <a:pPr indent="0" lvl="0" marL="0" rtl="0" algn="l">
+              <a:lnSpc>
+                <a:spcPct val="98000"/>
+              </a:lnSpc>
+              <a:spcBef>
+                <a:spcPts val="0"/>
+              </a:spcBef>
+              <a:spcAft>
+                <a:spcPts val="0"/>
+              </a:spcAft>
+              <a:buNone/>
+            </a:pPr>
+            <a:r>
+              <a:rPr b="1" lang="en-US" sz="1200">
+                <a:solidFill>
+                  <a:srgbClr val="488F69"/>
+                </a:solidFill>
+              </a:rPr>
+              <a:t>FINE-TUNE + RUNTIME</a:t>
+            </a:r>
+            <a:endParaRPr b="1" sz="1200">
+              <a:solidFill>
+                <a:srgbClr val="488F69"/>
+              </a:solidFill>
+            </a:endParaRPr>
+          </a:p>
+          <a:p>
+            <a:pPr indent="0" lvl="0" marL="0" rtl="0" algn="l">
+              <a:lnSpc>
+                <a:spcPct val="98000"/>
+              </a:lnSpc>
+              <a:spcBef>
+                <a:spcPts val="0"/>
+              </a:spcBef>
+              <a:spcAft>
+                <a:spcPts val="0"/>
+              </a:spcAft>
+              <a:buNone/>
+            </a:pPr>
+            <a:r>
+              <a:rPr lang="en-US" sz="1200">
+                <a:solidFill>
+                  <a:srgbClr val="4D6373"/>
+                </a:solidFill>
+              </a:rPr>
+              <a:t>model_script_utils.py · finetuning_utils.py</a:t>
+            </a:r>
+            <a:endParaRPr sz="1200">
+              <a:solidFill>
+                <a:srgbClr val="4D6373"/>
+              </a:solidFill>
+            </a:endParaRPr>
+          </a:p>
+          <a:p>
+            <a:pPr indent="0" lvl="0" marL="0" rtl="0" algn="l">
+              <a:lnSpc>
+                <a:spcPct val="98000"/>
+              </a:lnSpc>
+              <a:spcBef>
+                <a:spcPts val="0"/>
+              </a:spcBef>
+              <a:spcAft>
+                <a:spcPts val="0"/>
+              </a:spcAft>
+              <a:buNone/>
+            </a:pPr>
+            <a:r>
+              <a:rPr lang="en-US" sz="1200">
+                <a:solidFill>
+                  <a:srgbClr val="4D6373"/>
+                </a:solidFill>
+              </a:rPr>
+              <a:t>run_train.py · eval_configs.py</a:t>
+            </a:r>
+            <a:endParaRPr sz="1200">
+              <a:solidFill>
+                <a:srgbClr val="4D6373"/>
+              </a:solidFill>
+            </a:endParaRPr>
+          </a:p>
+          <a:p>
+            <a:pPr indent="0" lvl="0" marL="0" rtl="0" algn="l">
+              <a:lnSpc>
+                <a:spcPct val="98000"/>
+              </a:lnSpc>
+              <a:spcBef>
+                <a:spcPts val="0"/>
+              </a:spcBef>
+              <a:spcAft>
+                <a:spcPts val="0"/>
+              </a:spcAft>
+              <a:buNone/>
+            </a:pPr>
+            <a:r>
+              <a:rPr lang="en-US" sz="1200">
+                <a:solidFill>
+                  <a:srgbClr val="4D6373"/>
+                </a:solidFill>
+              </a:rPr>
+              <a:t>calculators/mace.py · ASE field / response I/O</a:t>
+            </a:r>
+            <a:endParaRPr sz="1200">
+              <a:solidFill>
+                <a:srgbClr val="4D6373"/>
+              </a:solidFill>
+            </a:endParaRPr>
           </a:p>
         </p:txBody>
       </p:sp>
